--- a/yocto_training_all_session_decks/session_decks/D3S6_SDK_devtool.pptx
+++ b/yocto_training_all_session_decks/session_decks/D3S6_SDK_devtool.pptx
@@ -5,26 +5,26 @@
     <p:sldMasterId id="2147483648" r:id="rId1"/>
   </p:sldMasterIdLst>
   <p:notesMasterIdLst>
-    <p:notesMasterId r:id="rId8"/>
+    <p:notesMasterId r:id="rId11"/>
   </p:notesMasterIdLst>
   <p:handoutMasterIdLst>
-    <p:handoutMasterId r:id="rId9"/>
+    <p:handoutMasterId r:id="rId12"/>
   </p:handoutMasterIdLst>
   <p:sldIdLst>
-    <p:sldId id="1007" r:id="rId18"/>
-    <p:sldId id="1008" r:id="rId19"/>
-    <p:sldId id="1009" r:id="rId20"/>
-    <p:sldId id="1010" r:id="rId21"/>
-    <p:sldId id="1011" r:id="rId22"/>
-    <p:sldId id="1012" r:id="rId23"/>
-    <p:sldId id="1013" r:id="rId24"/>
-    <p:sldId id="1014" r:id="rId25"/>
-    <p:sldId id="1015" r:id="rId26"/>
+    <p:sldId id="1007" r:id="rId2"/>
+    <p:sldId id="1008" r:id="rId3"/>
+    <p:sldId id="1009" r:id="rId4"/>
+    <p:sldId id="1010" r:id="rId5"/>
+    <p:sldId id="1011" r:id="rId6"/>
+    <p:sldId id="1012" r:id="rId7"/>
+    <p:sldId id="1013" r:id="rId8"/>
+    <p:sldId id="1014" r:id="rId9"/>
+    <p:sldId id="1015" r:id="rId10"/>
   </p:sldIdLst>
   <p:sldSz cx="12192000" cy="6858000"/>
   <p:notesSz cx="6858000" cy="9144000"/>
   <p:custDataLst>
-    <p:tags r:id="rId10"/>
+    <p:tags r:id="rId13"/>
   </p:custDataLst>
   <p:defaultTextStyle>
     <a:defPPr>
@@ -2930,7 +2930,7 @@
           <a:p>
             <a:fld id="{0CEC647C-F50C-4F78-AA33-D7AA6CDA18EE}" type="datetimeFigureOut">
               <a:rPr lang="en-US" smtClean="0"/>
-              <a:t>7/13/2025</a:t>
+              <a:t>6/11/2026</a:t>
             </a:fld>
             <a:endParaRPr lang="en-US"/>
           </a:p>
@@ -3095,7 +3095,7 @@
           <a:p>
             <a:fld id="{3A83341F-E62C-483B-84B4-966F8BE46097}" type="datetimeFigureOut">
               <a:rPr lang="en-US" smtClean="0"/>
-              <a:t>7/13/2025</a:t>
+              <a:t>6/11/2026</a:t>
             </a:fld>
             <a:endParaRPr lang="en-US"/>
           </a:p>
@@ -5179,8 +5179,8 @@
 </p:sldMaster>
 </file>
 
-<file path=ppt/slides/slide10.xml><?xml version="1.0" encoding="utf-8"?>
-<p:sld xmlns:a="http://schemas.openxmlformats.org/drawingml/2006/main" xmlns:p="http://schemas.openxmlformats.org/presentationml/2006/main" xmlns:r="http://schemas.openxmlformats.org/officeDocument/2006/relationships">
+<file path=ppt/slides/slide1.xml><?xml version="1.0" encoding="utf-8"?>
+<p:sld xmlns:a="http://schemas.openxmlformats.org/drawingml/2006/main" xmlns:r="http://schemas.openxmlformats.org/officeDocument/2006/relationships" xmlns:p="http://schemas.openxmlformats.org/presentationml/2006/main">
   <p:cSld>
     <p:spTree>
       <p:nvGrpSpPr>
@@ -5188,7 +5188,111 @@
         <p:cNvGrpSpPr/>
         <p:nvPr/>
       </p:nvGrpSpPr>
-      <p:grpSpPr/>
+      <p:grpSpPr>
+        <a:xfrm>
+          <a:off x="0" y="0"/>
+          <a:ext cx="0" cy="0"/>
+          <a:chOff x="0" y="0"/>
+          <a:chExt cx="0" cy="0"/>
+        </a:xfrm>
+      </p:grpSpPr>
+      <p:sp>
+        <p:nvSpPr>
+          <p:cNvPr id="2" name="Title 1"/>
+          <p:cNvSpPr>
+            <a:spLocks noGrp="1"/>
+          </p:cNvSpPr>
+          <p:nvPr>
+            <p:ph type="ctrTitle"/>
+          </p:nvPr>
+        </p:nvSpPr>
+        <p:spPr/>
+        <p:txBody>
+          <a:bodyPr/>
+          <a:lstStyle/>
+          <a:p>
+            <a:r>
+              <a:rPr sz="4400" b="1">
+                <a:solidFill>
+                  <a:srgbClr val="FFFFFF"/>
+                </a:solidFill>
+                <a:latin typeface="Calibri"/>
+              </a:rPr>
+              <a:t>Developer Workflow — SDK, eSDK, devtool</a:t>
+            </a:r>
+          </a:p>
+        </p:txBody>
+      </p:sp>
+      <p:sp>
+        <p:nvSpPr>
+          <p:cNvPr id="3" name="Subtitle 2"/>
+          <p:cNvSpPr>
+            <a:spLocks noGrp="1"/>
+          </p:cNvSpPr>
+          <p:nvPr>
+            <p:ph type="subTitle" idx="1"/>
+          </p:nvPr>
+        </p:nvSpPr>
+        <p:spPr/>
+        <p:txBody>
+          <a:bodyPr/>
+          <a:lstStyle/>
+          <a:p>
+            <a:r>
+              <a:rPr sz="1800" dirty="0">
+                <a:solidFill>
+                  <a:srgbClr val="FFFFFF"/>
+                </a:solidFill>
+                <a:latin typeface="Calibri"/>
+              </a:rPr>
+              <a:t>How your team actually works against a </a:t>
+            </a:r>
+            <a:r>
+              <a:rPr sz="1800" dirty="0" err="1">
+                <a:solidFill>
+                  <a:srgbClr val="FFFFFF"/>
+                </a:solidFill>
+                <a:latin typeface="Calibri"/>
+              </a:rPr>
+              <a:t>Yocto</a:t>
+            </a:r>
+            <a:r>
+              <a:rPr sz="1800" dirty="0">
+                <a:solidFill>
+                  <a:srgbClr val="FFFFFF"/>
+                </a:solidFill>
+                <a:latin typeface="Calibri"/>
+              </a:rPr>
+              <a:t> build</a:t>
+            </a:r>
+          </a:p>
+        </p:txBody>
+      </p:sp>
+    </p:spTree>
+  </p:cSld>
+  <p:clrMapOvr>
+    <a:masterClrMapping/>
+  </p:clrMapOvr>
+</p:sld>
+</file>
+
+<file path=ppt/slides/slide2.xml><?xml version="1.0" encoding="utf-8"?>
+<p:sld xmlns:a="http://schemas.openxmlformats.org/drawingml/2006/main" xmlns:r="http://schemas.openxmlformats.org/officeDocument/2006/relationships" xmlns:p="http://schemas.openxmlformats.org/presentationml/2006/main">
+  <p:cSld>
+    <p:spTree>
+      <p:nvGrpSpPr>
+        <p:cNvPr id="1" name=""/>
+        <p:cNvGrpSpPr/>
+        <p:nvPr/>
+      </p:nvGrpSpPr>
+      <p:grpSpPr>
+        <a:xfrm>
+          <a:off x="0" y="0"/>
+          <a:ext cx="0" cy="0"/>
+          <a:chOff x="0" y="0"/>
+          <a:chExt cx="0" cy="0"/>
+        </a:xfrm>
+      </p:grpSpPr>
       <p:sp>
         <p:nvSpPr>
           <p:cNvPr id="2" name="Title 1"/>
@@ -5211,7 +5315,175 @@
                 </a:solidFill>
                 <a:latin typeface="Calibri"/>
               </a:rPr>
-              <a:t>Generating and Installing the SDK</a:t>
+              <a:t>Session Agenda</a:t>
+            </a:r>
+          </a:p>
+        </p:txBody>
+      </p:sp>
+      <p:sp>
+        <p:nvSpPr>
+          <p:cNvPr id="3" name="TextBox 2"/>
+          <p:cNvSpPr txBox="1"/>
+          <p:nvPr/>
+        </p:nvSpPr>
+        <p:spPr>
+          <a:xfrm>
+            <a:off x="822960" y="1463040"/>
+            <a:ext cx="10515600" cy="5029200"/>
+          </a:xfrm>
+          <a:prstGeom prst="rect">
+            <a:avLst/>
+          </a:prstGeom>
+          <a:noFill/>
+        </p:spPr>
+        <p:txBody>
+          <a:bodyPr wrap="square" lIns="45720" rIns="45720">
+            <a:spAutoFit/>
+          </a:bodyPr>
+          <a:lstStyle/>
+          <a:p>
+            <a:pPr>
+              <a:spcAft>
+                <a:spcPts val="600"/>
+              </a:spcAft>
+            </a:pPr>
+            <a:r>
+              <a:rPr sz="2000" b="0" i="0">
+                <a:solidFill>
+                  <a:srgbClr val="333333"/>
+                </a:solidFill>
+                <a:latin typeface="Calibri"/>
+              </a:rPr>
+              <a:t>1.  SDK vs eSDK — what each is for</a:t>
+            </a:r>
+          </a:p>
+          <a:p>
+            <a:pPr>
+              <a:spcAft>
+                <a:spcPts val="600"/>
+              </a:spcAft>
+            </a:pPr>
+            <a:r>
+              <a:rPr sz="2000" b="0" i="0">
+                <a:solidFill>
+                  <a:srgbClr val="333333"/>
+                </a:solidFill>
+                <a:latin typeface="Calibri"/>
+              </a:rPr>
+              <a:t>2.  Generating and using the standard SDK</a:t>
+            </a:r>
+          </a:p>
+          <a:p>
+            <a:pPr>
+              <a:spcAft>
+                <a:spcPts val="600"/>
+              </a:spcAft>
+            </a:pPr>
+            <a:r>
+              <a:rPr sz="2000" b="0" i="0">
+                <a:solidFill>
+                  <a:srgbClr val="333333"/>
+                </a:solidFill>
+                <a:latin typeface="Calibri"/>
+              </a:rPr>
+              <a:t>3.  Extensible SDK — the application developer's tool</a:t>
+            </a:r>
+          </a:p>
+          <a:p>
+            <a:pPr>
+              <a:spcAft>
+                <a:spcPts val="600"/>
+              </a:spcAft>
+            </a:pPr>
+            <a:r>
+              <a:rPr sz="2000" b="0" i="0">
+                <a:solidFill>
+                  <a:srgbClr val="333333"/>
+                </a:solidFill>
+                <a:latin typeface="Calibri"/>
+              </a:rPr>
+              <a:t>4.  devtool — the modify/build/deploy/finish loop</a:t>
+            </a:r>
+          </a:p>
+          <a:p>
+            <a:pPr>
+              <a:spcAft>
+                <a:spcPts val="600"/>
+              </a:spcAft>
+            </a:pPr>
+            <a:r>
+              <a:rPr sz="2000" b="0" i="0">
+                <a:solidFill>
+                  <a:srgbClr val="333333"/>
+                </a:solidFill>
+                <a:latin typeface="Calibri"/>
+              </a:rPr>
+              <a:t>5.  Team workflow patterns</a:t>
+            </a:r>
+          </a:p>
+          <a:p>
+            <a:pPr>
+              <a:spcAft>
+                <a:spcPts val="600"/>
+              </a:spcAft>
+            </a:pPr>
+            <a:r>
+              <a:rPr sz="2000" b="0" i="0">
+                <a:solidFill>
+                  <a:srgbClr val="333333"/>
+                </a:solidFill>
+                <a:latin typeface="Calibri"/>
+              </a:rPr>
+              <a:t>6.  Integrating with IDEs and CI</a:t>
+            </a:r>
+          </a:p>
+        </p:txBody>
+      </p:sp>
+    </p:spTree>
+  </p:cSld>
+  <p:clrMapOvr>
+    <a:masterClrMapping/>
+  </p:clrMapOvr>
+</p:sld>
+</file>
+
+<file path=ppt/slides/slide3.xml><?xml version="1.0" encoding="utf-8"?>
+<p:sld xmlns:a="http://schemas.openxmlformats.org/drawingml/2006/main" xmlns:r="http://schemas.openxmlformats.org/officeDocument/2006/relationships" xmlns:p="http://schemas.openxmlformats.org/presentationml/2006/main">
+  <p:cSld>
+    <p:spTree>
+      <p:nvGrpSpPr>
+        <p:cNvPr id="1" name=""/>
+        <p:cNvGrpSpPr/>
+        <p:nvPr/>
+      </p:nvGrpSpPr>
+      <p:grpSpPr>
+        <a:xfrm>
+          <a:off x="0" y="0"/>
+          <a:ext cx="0" cy="0"/>
+          <a:chOff x="0" y="0"/>
+          <a:chExt cx="0" cy="0"/>
+        </a:xfrm>
+      </p:grpSpPr>
+      <p:sp>
+        <p:nvSpPr>
+          <p:cNvPr id="2" name="Title 1"/>
+          <p:cNvSpPr>
+            <a:spLocks noGrp="1"/>
+          </p:cNvSpPr>
+          <p:nvPr>
+            <p:ph type="title"/>
+          </p:nvPr>
+        </p:nvSpPr>
+        <p:spPr/>
+        <p:txBody>
+          <a:bodyPr/>
+          <a:lstStyle/>
+          <a:p>
+            <a:r>
+              <a:rPr sz="3200" b="1" dirty="0">
+                <a:latin typeface="Calibri"/>
+              </a:rPr>
+              <a:t>Two SDKs, Different Goals</a:t>
             </a:r>
           </a:p>
         </p:txBody>
@@ -5233,7 +5505,637 @@
           <a:noFill/>
         </p:spPr>
         <p:txBody>
-          <a:bodyPr wrap="square" anchor="t" lIns="45720" rIns="45720">
+          <a:bodyPr wrap="square" lIns="45720" rIns="45720" anchor="t">
+            <a:spAutoFit/>
+          </a:bodyPr>
+          <a:lstStyle/>
+          <a:p>
+            <a:pPr algn="l"/>
+            <a:r>
+              <a:rPr sz="1500" b="0" i="1">
+                <a:solidFill>
+                  <a:srgbClr val="666666"/>
+                </a:solidFill>
+                <a:latin typeface="Calibri"/>
+              </a:rPr>
+              <a:t>Pick by who's using it and what they need to do.</a:t>
+            </a:r>
+          </a:p>
+        </p:txBody>
+      </p:sp>
+      <p:sp>
+        <p:nvSpPr>
+          <p:cNvPr id="4" name="Rounded Rectangle 3"/>
+          <p:cNvSpPr/>
+          <p:nvPr/>
+        </p:nvSpPr>
+        <p:spPr>
+          <a:xfrm>
+            <a:off x="822960" y="1783080"/>
+            <a:ext cx="5120640" cy="4572000"/>
+          </a:xfrm>
+          <a:prstGeom prst="roundRect">
+            <a:avLst/>
+          </a:prstGeom>
+          <a:solidFill>
+            <a:srgbClr val="FCE4EC"/>
+          </a:solidFill>
+          <a:ln w="6350">
+            <a:solidFill>
+              <a:srgbClr val="CC0066"/>
+            </a:solidFill>
+          </a:ln>
+          <a:effectLst/>
+        </p:spPr>
+        <p:style>
+          <a:lnRef idx="1">
+            <a:schemeClr val="accent1"/>
+          </a:lnRef>
+          <a:fillRef idx="3">
+            <a:schemeClr val="accent1"/>
+          </a:fillRef>
+          <a:effectRef idx="2">
+            <a:schemeClr val="accent1"/>
+          </a:effectRef>
+          <a:fontRef idx="minor">
+            <a:schemeClr val="lt1"/>
+          </a:fontRef>
+        </p:style>
+        <p:txBody>
+          <a:bodyPr rtlCol="0" anchor="ctr"/>
+          <a:lstStyle/>
+          <a:p>
+            <a:pPr algn="ctr"/>
+            <a:endParaRPr/>
+          </a:p>
+        </p:txBody>
+      </p:sp>
+      <p:sp>
+        <p:nvSpPr>
+          <p:cNvPr id="5" name="TextBox 4"/>
+          <p:cNvSpPr txBox="1"/>
+          <p:nvPr/>
+        </p:nvSpPr>
+        <p:spPr>
+          <a:xfrm>
+            <a:off x="960120" y="1920240"/>
+            <a:ext cx="4937760" cy="457200"/>
+          </a:xfrm>
+          <a:prstGeom prst="rect">
+            <a:avLst/>
+          </a:prstGeom>
+          <a:noFill/>
+        </p:spPr>
+        <p:txBody>
+          <a:bodyPr wrap="square" lIns="45720" rIns="45720" anchor="t">
+            <a:spAutoFit/>
+          </a:bodyPr>
+          <a:lstStyle/>
+          <a:p>
+            <a:pPr algn="l"/>
+            <a:r>
+              <a:rPr sz="1800" b="1" i="0">
+                <a:solidFill>
+                  <a:srgbClr val="CC0066"/>
+                </a:solidFill>
+                <a:latin typeface="Calibri"/>
+              </a:rPr>
+              <a:t>SDK (standard)</a:t>
+            </a:r>
+          </a:p>
+        </p:txBody>
+      </p:sp>
+      <p:sp>
+        <p:nvSpPr>
+          <p:cNvPr id="6" name="TextBox 5"/>
+          <p:cNvSpPr txBox="1"/>
+          <p:nvPr/>
+        </p:nvSpPr>
+        <p:spPr>
+          <a:xfrm>
+            <a:off x="960120" y="2468880"/>
+            <a:ext cx="4937760" cy="3313728"/>
+          </a:xfrm>
+          <a:prstGeom prst="rect">
+            <a:avLst/>
+          </a:prstGeom>
+          <a:noFill/>
+        </p:spPr>
+        <p:txBody>
+          <a:bodyPr wrap="square" lIns="45720" rIns="45720">
+            <a:spAutoFit/>
+          </a:bodyPr>
+          <a:lstStyle/>
+          <a:p>
+            <a:pPr>
+              <a:spcAft>
+                <a:spcPts val="400"/>
+              </a:spcAft>
+            </a:pPr>
+            <a:r>
+              <a:rPr b="1" i="0">
+                <a:solidFill>
+                  <a:srgbClr val="CC0066"/>
+                </a:solidFill>
+                <a:latin typeface="Calibri"/>
+              </a:rPr>
+              <a:t>Goal</a:t>
+            </a:r>
+          </a:p>
+          <a:p>
+            <a:pPr>
+              <a:spcAft>
+                <a:spcPts val="1000"/>
+              </a:spcAft>
+            </a:pPr>
+            <a:r>
+              <a:rPr sz="1600" b="0" i="0">
+                <a:solidFill>
+                  <a:srgbClr val="333333"/>
+                </a:solidFill>
+                <a:latin typeface="Calibri"/>
+              </a:rPr>
+              <a:t>Cross-compile applications against a target sysroot</a:t>
+            </a:r>
+          </a:p>
+          <a:p>
+            <a:pPr>
+              <a:spcAft>
+                <a:spcPts val="400"/>
+              </a:spcAft>
+            </a:pPr>
+            <a:r>
+              <a:rPr b="1" i="0">
+                <a:solidFill>
+                  <a:srgbClr val="CC0066"/>
+                </a:solidFill>
+                <a:latin typeface="Calibri"/>
+              </a:rPr>
+              <a:t>Who uses it</a:t>
+            </a:r>
+          </a:p>
+          <a:p>
+            <a:pPr>
+              <a:spcAft>
+                <a:spcPts val="1000"/>
+              </a:spcAft>
+            </a:pPr>
+            <a:r>
+              <a:rPr sz="1600" b="0" i="0">
+                <a:solidFill>
+                  <a:srgbClr val="333333"/>
+                </a:solidFill>
+                <a:latin typeface="Calibri"/>
+              </a:rPr>
+              <a:t>App developers writing C/C++/Rust/Go for the target</a:t>
+            </a:r>
+          </a:p>
+          <a:p>
+            <a:pPr>
+              <a:spcAft>
+                <a:spcPts val="400"/>
+              </a:spcAft>
+            </a:pPr>
+            <a:r>
+              <a:rPr b="1" i="0">
+                <a:solidFill>
+                  <a:srgbClr val="CC0066"/>
+                </a:solidFill>
+                <a:latin typeface="Calibri"/>
+              </a:rPr>
+              <a:t>What it contains</a:t>
+            </a:r>
+          </a:p>
+          <a:p>
+            <a:pPr>
+              <a:spcAft>
+                <a:spcPts val="400"/>
+              </a:spcAft>
+            </a:pPr>
+            <a:r>
+              <a:rPr sz="1600" b="0" i="0">
+                <a:solidFill>
+                  <a:srgbClr val="333333"/>
+                </a:solidFill>
+                <a:latin typeface="Calibri"/>
+              </a:rPr>
+              <a:t>• Cross-toolchain</a:t>
+            </a:r>
+          </a:p>
+          <a:p>
+            <a:pPr>
+              <a:spcAft>
+                <a:spcPts val="400"/>
+              </a:spcAft>
+            </a:pPr>
+            <a:r>
+              <a:rPr sz="1600" b="0" i="0">
+                <a:solidFill>
+                  <a:srgbClr val="333333"/>
+                </a:solidFill>
+                <a:latin typeface="Calibri"/>
+              </a:rPr>
+              <a:t>• Target sysroot (headers, libs)</a:t>
+            </a:r>
+          </a:p>
+          <a:p>
+            <a:pPr>
+              <a:spcAft>
+                <a:spcPts val="800"/>
+              </a:spcAft>
+            </a:pPr>
+            <a:r>
+              <a:rPr sz="1600" b="0" i="0">
+                <a:solidFill>
+                  <a:srgbClr val="333333"/>
+                </a:solidFill>
+                <a:latin typeface="Calibri"/>
+              </a:rPr>
+              <a:t>• Environment script</a:t>
+            </a:r>
+          </a:p>
+          <a:p>
+            <a:pPr>
+              <a:spcAft>
+                <a:spcPts val="400"/>
+              </a:spcAft>
+            </a:pPr>
+            <a:r>
+              <a:rPr b="1" i="0">
+                <a:solidFill>
+                  <a:srgbClr val="CC0066"/>
+                </a:solidFill>
+                <a:latin typeface="Calibri"/>
+              </a:rPr>
+              <a:t>Generate</a:t>
+            </a:r>
+          </a:p>
+          <a:p>
+            <a:pPr>
+              <a:spcAft>
+                <a:spcPts val="400"/>
+              </a:spcAft>
+            </a:pPr>
+            <a:r>
+              <a:rPr sz="1400" b="0" i="0">
+                <a:solidFill>
+                  <a:srgbClr val="333333"/>
+                </a:solidFill>
+                <a:latin typeface="Consolas"/>
+              </a:rPr>
+              <a:t>bitbake core-image-base -c populate_sdk</a:t>
+            </a:r>
+          </a:p>
+        </p:txBody>
+      </p:sp>
+      <p:sp>
+        <p:nvSpPr>
+          <p:cNvPr id="7" name="Rounded Rectangle 6"/>
+          <p:cNvSpPr/>
+          <p:nvPr/>
+        </p:nvSpPr>
+        <p:spPr>
+          <a:xfrm>
+            <a:off x="6263640" y="1783080"/>
+            <a:ext cx="5120640" cy="4572000"/>
+          </a:xfrm>
+          <a:prstGeom prst="roundRect">
+            <a:avLst/>
+          </a:prstGeom>
+          <a:solidFill>
+            <a:srgbClr val="E9D8F0"/>
+          </a:solidFill>
+          <a:ln w="6350">
+            <a:solidFill>
+              <a:srgbClr val="663399"/>
+            </a:solidFill>
+          </a:ln>
+          <a:effectLst/>
+        </p:spPr>
+        <p:style>
+          <a:lnRef idx="1">
+            <a:schemeClr val="accent1"/>
+          </a:lnRef>
+          <a:fillRef idx="3">
+            <a:schemeClr val="accent1"/>
+          </a:fillRef>
+          <a:effectRef idx="2">
+            <a:schemeClr val="accent1"/>
+          </a:effectRef>
+          <a:fontRef idx="minor">
+            <a:schemeClr val="lt1"/>
+          </a:fontRef>
+        </p:style>
+        <p:txBody>
+          <a:bodyPr rtlCol="0" anchor="ctr"/>
+          <a:lstStyle/>
+          <a:p>
+            <a:pPr algn="ctr"/>
+            <a:endParaRPr/>
+          </a:p>
+        </p:txBody>
+      </p:sp>
+      <p:sp>
+        <p:nvSpPr>
+          <p:cNvPr id="8" name="TextBox 7"/>
+          <p:cNvSpPr txBox="1"/>
+          <p:nvPr/>
+        </p:nvSpPr>
+        <p:spPr>
+          <a:xfrm>
+            <a:off x="6400800" y="1920240"/>
+            <a:ext cx="4937760" cy="457200"/>
+          </a:xfrm>
+          <a:prstGeom prst="rect">
+            <a:avLst/>
+          </a:prstGeom>
+          <a:noFill/>
+        </p:spPr>
+        <p:txBody>
+          <a:bodyPr wrap="square" lIns="45720" rIns="45720" anchor="t">
+            <a:spAutoFit/>
+          </a:bodyPr>
+          <a:lstStyle/>
+          <a:p>
+            <a:pPr algn="l"/>
+            <a:r>
+              <a:rPr sz="1800" b="1" i="0">
+                <a:solidFill>
+                  <a:srgbClr val="663399"/>
+                </a:solidFill>
+                <a:latin typeface="Calibri"/>
+              </a:rPr>
+              <a:t>eSDK (extensible)</a:t>
+            </a:r>
+          </a:p>
+        </p:txBody>
+      </p:sp>
+      <p:sp>
+        <p:nvSpPr>
+          <p:cNvPr id="9" name="TextBox 8"/>
+          <p:cNvSpPr txBox="1"/>
+          <p:nvPr/>
+        </p:nvSpPr>
+        <p:spPr>
+          <a:xfrm>
+            <a:off x="6400800" y="2468880"/>
+            <a:ext cx="4937760" cy="3611245"/>
+          </a:xfrm>
+          <a:prstGeom prst="rect">
+            <a:avLst/>
+          </a:prstGeom>
+          <a:noFill/>
+        </p:spPr>
+        <p:txBody>
+          <a:bodyPr wrap="square" lIns="45720" rIns="45720">
+            <a:spAutoFit/>
+          </a:bodyPr>
+          <a:lstStyle/>
+          <a:p>
+            <a:pPr>
+              <a:spcAft>
+                <a:spcPts val="400"/>
+              </a:spcAft>
+            </a:pPr>
+            <a:r>
+              <a:rPr b="1" i="0">
+                <a:solidFill>
+                  <a:srgbClr val="663399"/>
+                </a:solidFill>
+                <a:latin typeface="Calibri"/>
+              </a:rPr>
+              <a:t>Goal</a:t>
+            </a:r>
+          </a:p>
+          <a:p>
+            <a:pPr>
+              <a:spcAft>
+                <a:spcPts val="1000"/>
+              </a:spcAft>
+            </a:pPr>
+            <a:r>
+              <a:rPr sz="1600" b="0" i="0">
+                <a:solidFill>
+                  <a:srgbClr val="333333"/>
+                </a:solidFill>
+                <a:latin typeface="Calibri"/>
+              </a:rPr>
+              <a:t>Work on recipes without the full Yocto setup</a:t>
+            </a:r>
+          </a:p>
+          <a:p>
+            <a:pPr>
+              <a:spcAft>
+                <a:spcPts val="400"/>
+              </a:spcAft>
+            </a:pPr>
+            <a:r>
+              <a:rPr b="1" i="0">
+                <a:solidFill>
+                  <a:srgbClr val="663399"/>
+                </a:solidFill>
+                <a:latin typeface="Calibri"/>
+              </a:rPr>
+              <a:t>Who uses it</a:t>
+            </a:r>
+          </a:p>
+          <a:p>
+            <a:pPr>
+              <a:spcAft>
+                <a:spcPts val="1000"/>
+              </a:spcAft>
+            </a:pPr>
+            <a:r>
+              <a:rPr sz="1600" b="0" i="0">
+                <a:solidFill>
+                  <a:srgbClr val="333333"/>
+                </a:solidFill>
+                <a:latin typeface="Calibri"/>
+              </a:rPr>
+              <a:t>Engineers who want to modify recipes / kernel / images</a:t>
+            </a:r>
+          </a:p>
+          <a:p>
+            <a:pPr>
+              <a:spcAft>
+                <a:spcPts val="400"/>
+              </a:spcAft>
+            </a:pPr>
+            <a:r>
+              <a:rPr b="1" i="0">
+                <a:solidFill>
+                  <a:srgbClr val="663399"/>
+                </a:solidFill>
+                <a:latin typeface="Calibri"/>
+              </a:rPr>
+              <a:t>What it adds</a:t>
+            </a:r>
+          </a:p>
+          <a:p>
+            <a:pPr>
+              <a:spcAft>
+                <a:spcPts val="400"/>
+              </a:spcAft>
+            </a:pPr>
+            <a:r>
+              <a:rPr sz="1600" b="0" i="0">
+                <a:solidFill>
+                  <a:srgbClr val="333333"/>
+                </a:solidFill>
+                <a:latin typeface="Calibri"/>
+              </a:rPr>
+              <a:t>• Everything in SDK</a:t>
+            </a:r>
+          </a:p>
+          <a:p>
+            <a:pPr>
+              <a:spcAft>
+                <a:spcPts val="400"/>
+              </a:spcAft>
+            </a:pPr>
+            <a:r>
+              <a:rPr sz="1600" b="0" i="0">
+                <a:solidFill>
+                  <a:srgbClr val="333333"/>
+                </a:solidFill>
+                <a:latin typeface="Calibri"/>
+              </a:rPr>
+              <a:t>• devtool</a:t>
+            </a:r>
+          </a:p>
+          <a:p>
+            <a:pPr>
+              <a:spcAft>
+                <a:spcPts val="400"/>
+              </a:spcAft>
+            </a:pPr>
+            <a:r>
+              <a:rPr sz="1600" b="0" i="0">
+                <a:solidFill>
+                  <a:srgbClr val="333333"/>
+                </a:solidFill>
+                <a:latin typeface="Calibri"/>
+              </a:rPr>
+              <a:t>• A mini-Yocto under the hood</a:t>
+            </a:r>
+          </a:p>
+          <a:p>
+            <a:pPr>
+              <a:spcAft>
+                <a:spcPts val="800"/>
+              </a:spcAft>
+            </a:pPr>
+            <a:r>
+              <a:rPr sz="1600" b="0" i="0">
+                <a:solidFill>
+                  <a:srgbClr val="333333"/>
+                </a:solidFill>
+                <a:latin typeface="Calibri"/>
+              </a:rPr>
+              <a:t>• Recipe development workflow</a:t>
+            </a:r>
+          </a:p>
+          <a:p>
+            <a:pPr>
+              <a:spcAft>
+                <a:spcPts val="400"/>
+              </a:spcAft>
+            </a:pPr>
+            <a:r>
+              <a:rPr b="1" i="0">
+                <a:solidFill>
+                  <a:srgbClr val="663399"/>
+                </a:solidFill>
+                <a:latin typeface="Calibri"/>
+              </a:rPr>
+              <a:t>Generate</a:t>
+            </a:r>
+          </a:p>
+          <a:p>
+            <a:pPr>
+              <a:spcAft>
+                <a:spcPts val="400"/>
+              </a:spcAft>
+            </a:pPr>
+            <a:r>
+              <a:rPr sz="1400" b="0" i="0">
+                <a:solidFill>
+                  <a:srgbClr val="333333"/>
+                </a:solidFill>
+                <a:latin typeface="Consolas"/>
+              </a:rPr>
+              <a:t>bitbake core-image-base -c populate_sdk_ext</a:t>
+            </a:r>
+          </a:p>
+        </p:txBody>
+      </p:sp>
+    </p:spTree>
+  </p:cSld>
+  <p:clrMapOvr>
+    <a:masterClrMapping/>
+  </p:clrMapOvr>
+</p:sld>
+</file>
+
+<file path=ppt/slides/slide4.xml><?xml version="1.0" encoding="utf-8"?>
+<p:sld xmlns:a="http://schemas.openxmlformats.org/drawingml/2006/main" xmlns:r="http://schemas.openxmlformats.org/officeDocument/2006/relationships" xmlns:p="http://schemas.openxmlformats.org/presentationml/2006/main">
+  <p:cSld>
+    <p:spTree>
+      <p:nvGrpSpPr>
+        <p:cNvPr id="1" name=""/>
+        <p:cNvGrpSpPr/>
+        <p:nvPr/>
+      </p:nvGrpSpPr>
+      <p:grpSpPr>
+        <a:xfrm>
+          <a:off x="0" y="0"/>
+          <a:ext cx="0" cy="0"/>
+          <a:chOff x="0" y="0"/>
+          <a:chExt cx="0" cy="0"/>
+        </a:xfrm>
+      </p:grpSpPr>
+      <p:sp>
+        <p:nvSpPr>
+          <p:cNvPr id="2" name="Title 1"/>
+          <p:cNvSpPr>
+            <a:spLocks noGrp="1"/>
+          </p:cNvSpPr>
+          <p:nvPr>
+            <p:ph type="title"/>
+          </p:nvPr>
+        </p:nvSpPr>
+        <p:spPr/>
+        <p:txBody>
+          <a:bodyPr/>
+          <a:lstStyle/>
+          <a:p>
+            <a:r>
+              <a:rPr sz="3200" b="1" dirty="0">
+                <a:latin typeface="Calibri"/>
+              </a:rPr>
+              <a:t>Generating and Installing the SDK</a:t>
+            </a:r>
+          </a:p>
+        </p:txBody>
+      </p:sp>
+      <p:sp>
+        <p:nvSpPr>
+          <p:cNvPr id="3" name="TextBox 2"/>
+          <p:cNvSpPr txBox="1"/>
+          <p:nvPr/>
+        </p:nvSpPr>
+        <p:spPr>
+          <a:xfrm>
+            <a:off x="822960" y="1417320"/>
+            <a:ext cx="10515600" cy="365760"/>
+          </a:xfrm>
+          <a:prstGeom prst="rect">
+            <a:avLst/>
+          </a:prstGeom>
+          <a:noFill/>
+        </p:spPr>
+        <p:txBody>
+          <a:bodyPr wrap="square" lIns="45720" rIns="45720" anchor="t">
             <a:spAutoFit/>
           </a:bodyPr>
           <a:lstStyle/>
@@ -5294,6 +6196,7 @@
           <a:lstStyle/>
           <a:p>
             <a:pPr algn="ctr"/>
+            <a:endParaRPr/>
           </a:p>
         </p:txBody>
       </p:sp>
@@ -5338,6 +6241,7 @@
           <a:lstStyle/>
           <a:p>
             <a:pPr algn="ctr"/>
+            <a:endParaRPr/>
           </a:p>
         </p:txBody>
       </p:sp>
@@ -5349,8 +6253,8 @@
         </p:nvSpPr>
         <p:spPr>
           <a:xfrm>
-            <a:off x="1005840" y="1874519"/>
-            <a:ext cx="10241280" cy="4389120"/>
+            <a:off x="1127760" y="1783080"/>
+            <a:ext cx="10241280" cy="4616648"/>
           </a:xfrm>
           <a:prstGeom prst="rect">
             <a:avLst/>
@@ -5369,7 +6273,7 @@
               </a:spcAft>
             </a:pPr>
             <a:r>
-              <a:rPr sz="1000" i="1">
+              <a:rPr sz="1400" i="1" dirty="0">
                 <a:solidFill>
                   <a:srgbClr val="808080"/>
                 </a:solidFill>
@@ -5385,14 +6289,38 @@
               </a:spcAft>
             </a:pPr>
             <a:r>
-              <a:rPr sz="1000">
+              <a:rPr sz="1400" dirty="0" err="1">
                 <a:solidFill>
                   <a:srgbClr val="2D2D2D"/>
                 </a:solidFill>
                 <a:latin typeface="Consolas"/>
               </a:rPr>
-              <a:t>bitbake core-image-base -c populate_sdk</a:t>
-            </a:r>
+              <a:t>bitbake</a:t>
+            </a:r>
+            <a:r>
+              <a:rPr sz="1400" dirty="0">
+                <a:solidFill>
+                  <a:srgbClr val="2D2D2D"/>
+                </a:solidFill>
+                <a:latin typeface="Consolas"/>
+              </a:rPr>
+              <a:t> core-image-base -c </a:t>
+            </a:r>
+            <a:r>
+              <a:rPr sz="1400" dirty="0" err="1">
+                <a:solidFill>
+                  <a:srgbClr val="2D2D2D"/>
+                </a:solidFill>
+                <a:latin typeface="Consolas"/>
+              </a:rPr>
+              <a:t>populate_sdk</a:t>
+            </a:r>
+            <a:endParaRPr sz="1400" dirty="0">
+              <a:solidFill>
+                <a:srgbClr val="2D2D2D"/>
+              </a:solidFill>
+              <a:latin typeface="Consolas"/>
+            </a:endParaRPr>
           </a:p>
           <a:p>
             <a:pPr>
@@ -5401,7 +6329,7 @@
               </a:spcAft>
             </a:pPr>
             <a:r>
-              <a:rPr sz="1000">
+              <a:rPr sz="1400" dirty="0">
                 <a:solidFill>
                   <a:srgbClr val="2D2D2D"/>
                 </a:solidFill>
@@ -5417,7 +6345,7 @@
               </a:spcAft>
             </a:pPr>
             <a:r>
-              <a:rPr sz="1000" i="1">
+              <a:rPr sz="1400" i="1" dirty="0">
                 <a:solidFill>
                   <a:srgbClr val="808080"/>
                 </a:solidFill>
@@ -5433,13 +6361,49 @@
               </a:spcAft>
             </a:pPr>
             <a:r>
-              <a:rPr sz="1000">
+              <a:rPr sz="1400" dirty="0">
                 <a:solidFill>
                   <a:srgbClr val="2D2D2D"/>
                 </a:solidFill>
                 <a:latin typeface="Consolas"/>
               </a:rPr>
-              <a:t>ls tmp/deploy/sdk/</a:t>
+              <a:t>ls </a:t>
+            </a:r>
+            <a:r>
+              <a:rPr sz="1400" dirty="0" err="1">
+                <a:solidFill>
+                  <a:srgbClr val="2D2D2D"/>
+                </a:solidFill>
+                <a:latin typeface="Consolas"/>
+              </a:rPr>
+              <a:t>tmp</a:t>
+            </a:r>
+            <a:r>
+              <a:rPr sz="1400" dirty="0">
+                <a:solidFill>
+                  <a:srgbClr val="2D2D2D"/>
+                </a:solidFill>
+                <a:latin typeface="Consolas"/>
+              </a:rPr>
+              <a:t>/deploy/</a:t>
+            </a:r>
+            <a:r>
+              <a:rPr sz="1400" dirty="0" err="1">
+                <a:solidFill>
+                  <a:srgbClr val="2D2D2D"/>
+                </a:solidFill>
+                <a:latin typeface="Consolas"/>
+              </a:rPr>
+              <a:t>sdk</a:t>
+            </a:r>
+            <a:r>
+              <a:rPr sz="1400" dirty="0">
+                <a:solidFill>
+                  <a:srgbClr val="2D2D2D"/>
+                </a:solidFill>
+                <a:latin typeface="Consolas"/>
+              </a:rPr>
+              <a:t>/</a:t>
             </a:r>
           </a:p>
           <a:p>
@@ -5449,7 +6413,7 @@
               </a:spcAft>
             </a:pPr>
             <a:r>
-              <a:rPr sz="1000" i="1">
+              <a:rPr sz="1400" i="1" dirty="0">
                 <a:solidFill>
                   <a:srgbClr val="808080"/>
                 </a:solidFill>
@@ -5465,7 +6429,7 @@
               </a:spcAft>
             </a:pPr>
             <a:r>
-              <a:rPr sz="1000">
+              <a:rPr sz="1400" dirty="0">
                 <a:solidFill>
                   <a:srgbClr val="2D2D2D"/>
                 </a:solidFill>
@@ -5481,13 +6445,31 @@
               </a:spcAft>
             </a:pPr>
             <a:r>
-              <a:rPr sz="1000" i="1">
+              <a:rPr sz="1400" i="1" dirty="0">
                 <a:solidFill>
                   <a:srgbClr val="808080"/>
                 </a:solidFill>
                 <a:latin typeface="Consolas"/>
               </a:rPr>
-              <a:t># 2. Ship the .sh installer to developers</a:t>
+              <a:t># 2. Ship the .</a:t>
+            </a:r>
+            <a:r>
+              <a:rPr sz="1400" i="1" dirty="0" err="1">
+                <a:solidFill>
+                  <a:srgbClr val="808080"/>
+                </a:solidFill>
+                <a:latin typeface="Consolas"/>
+              </a:rPr>
+              <a:t>sh</a:t>
+            </a:r>
+            <a:r>
+              <a:rPr sz="1400" i="1" dirty="0">
+                <a:solidFill>
+                  <a:srgbClr val="808080"/>
+                </a:solidFill>
+                <a:latin typeface="Consolas"/>
+              </a:rPr>
+              <a:t> installer to developers</a:t>
             </a:r>
           </a:p>
           <a:p>
@@ -5497,13 +6479,22 @@
               </a:spcAft>
             </a:pPr>
             <a:r>
-              <a:rPr sz="1000">
+              <a:rPr sz="1400" dirty="0" err="1">
                 <a:solidFill>
                   <a:srgbClr val="2D2D2D"/>
                 </a:solidFill>
                 <a:latin typeface="Consolas"/>
               </a:rPr>
-              <a:t>scp tmp/deploy/sdk/*.sh dev-laptop:~/</a:t>
+              <a:t>scp</a:t>
+            </a:r>
+            <a:r>
+              <a:rPr sz="1400" dirty="0">
+                <a:solidFill>
+                  <a:srgbClr val="2D2D2D"/>
+                </a:solidFill>
+                <a:latin typeface="Consolas"/>
+              </a:rPr>
+              <a:t> tmp/deploy/sdk/*.sh dev-laptop:~/</a:t>
             </a:r>
           </a:p>
           <a:p>
@@ -5513,7 +6504,7 @@
               </a:spcAft>
             </a:pPr>
             <a:r>
-              <a:rPr sz="1000">
+              <a:rPr sz="1400" dirty="0">
                 <a:solidFill>
                   <a:srgbClr val="2D2D2D"/>
                 </a:solidFill>
@@ -5529,7 +6520,7 @@
               </a:spcAft>
             </a:pPr>
             <a:r>
-              <a:rPr sz="1000" i="1">
+              <a:rPr sz="1400" i="1" dirty="0">
                 <a:solidFill>
                   <a:srgbClr val="808080"/>
                 </a:solidFill>
@@ -5545,13 +6536,22 @@
               </a:spcAft>
             </a:pPr>
             <a:r>
-              <a:rPr sz="1000">
+              <a:rPr sz="1400" dirty="0" err="1">
                 <a:solidFill>
                   <a:srgbClr val="2D2D2D"/>
                 </a:solidFill>
                 <a:latin typeface="Consolas"/>
               </a:rPr>
-              <a:t>chmod +x poky-*-toolchain-5.0.sh</a:t>
+              <a:t>chmod</a:t>
+            </a:r>
+            <a:r>
+              <a:rPr sz="1400" dirty="0">
+                <a:solidFill>
+                  <a:srgbClr val="2D2D2D"/>
+                </a:solidFill>
+                <a:latin typeface="Consolas"/>
+              </a:rPr>
+              <a:t> +x poky-*-toolchain-5.0.sh</a:t>
             </a:r>
           </a:p>
           <a:p>
@@ -5561,7 +6561,7 @@
               </a:spcAft>
             </a:pPr>
             <a:r>
-              <a:rPr sz="1000">
+              <a:rPr sz="1400" dirty="0">
                 <a:solidFill>
                   <a:srgbClr val="2D2D2D"/>
                 </a:solidFill>
@@ -5577,7 +6577,7 @@
               </a:spcAft>
             </a:pPr>
             <a:r>
-              <a:rPr sz="1000" i="1">
+              <a:rPr sz="1400" i="1" dirty="0">
                 <a:solidFill>
                   <a:srgbClr val="808080"/>
                 </a:solidFill>
@@ -5593,7 +6593,7 @@
               </a:spcAft>
             </a:pPr>
             <a:r>
-              <a:rPr sz="1000">
+              <a:rPr sz="1400" dirty="0">
                 <a:solidFill>
                   <a:srgbClr val="2D2D2D"/>
                 </a:solidFill>
@@ -5609,7 +6609,7 @@
               </a:spcAft>
             </a:pPr>
             <a:r>
-              <a:rPr sz="1000" i="1">
+              <a:rPr sz="1400" i="1" dirty="0">
                 <a:solidFill>
                   <a:srgbClr val="808080"/>
                 </a:solidFill>
@@ -5625,7 +6625,7 @@
               </a:spcAft>
             </a:pPr>
             <a:r>
-              <a:rPr sz="1000">
+              <a:rPr sz="1400" dirty="0">
                 <a:solidFill>
                   <a:srgbClr val="2D2D2D"/>
                 </a:solidFill>
@@ -5641,7 +6641,7 @@
               </a:spcAft>
             </a:pPr>
             <a:r>
-              <a:rPr sz="1000">
+              <a:rPr sz="1400" dirty="0">
                 <a:solidFill>
                   <a:srgbClr val="2D2D2D"/>
                 </a:solidFill>
@@ -5657,7 +6657,7 @@
               </a:spcAft>
             </a:pPr>
             <a:r>
-              <a:rPr sz="1000" i="1">
+              <a:rPr sz="1400" i="1" dirty="0">
                 <a:solidFill>
                   <a:srgbClr val="808080"/>
                 </a:solidFill>
@@ -5673,7 +6673,7 @@
               </a:spcAft>
             </a:pPr>
             <a:r>
-              <a:rPr sz="1000">
+              <a:rPr sz="1400" dirty="0">
                 <a:solidFill>
                   <a:srgbClr val="2D2D2D"/>
                 </a:solidFill>
@@ -5689,13 +6689,85 @@
               </a:spcAft>
             </a:pPr>
             <a:r>
-              <a:rPr sz="1000" i="1">
+              <a:rPr sz="1400" i="1" dirty="0">
                 <a:solidFill>
                   <a:srgbClr val="808080"/>
                 </a:solidFill>
                 <a:latin typeface="Consolas"/>
               </a:rPr>
-              <a:t># arm-poky-linux-gnueabi-gcc  --sysroot=/opt/poky/5.0/sysroots/cortexa72-poky-linux</a:t>
+              <a:t># arm-poky-</a:t>
+            </a:r>
+            <a:r>
+              <a:rPr sz="1400" i="1" dirty="0" err="1">
+                <a:solidFill>
+                  <a:srgbClr val="808080"/>
+                </a:solidFill>
+                <a:latin typeface="Consolas"/>
+              </a:rPr>
+              <a:t>linux</a:t>
+            </a:r>
+            <a:r>
+              <a:rPr sz="1400" i="1" dirty="0">
+                <a:solidFill>
+                  <a:srgbClr val="808080"/>
+                </a:solidFill>
+                <a:latin typeface="Consolas"/>
+              </a:rPr>
+              <a:t>-</a:t>
+            </a:r>
+            <a:r>
+              <a:rPr sz="1400" i="1" dirty="0" err="1">
+                <a:solidFill>
+                  <a:srgbClr val="808080"/>
+                </a:solidFill>
+                <a:latin typeface="Consolas"/>
+              </a:rPr>
+              <a:t>gnueabi-gcc</a:t>
+            </a:r>
+            <a:r>
+              <a:rPr sz="1400" i="1" dirty="0">
+                <a:solidFill>
+                  <a:srgbClr val="808080"/>
+                </a:solidFill>
+                <a:latin typeface="Consolas"/>
+              </a:rPr>
+              <a:t>  --</a:t>
+            </a:r>
+            <a:r>
+              <a:rPr sz="1400" i="1" dirty="0" err="1">
+                <a:solidFill>
+                  <a:srgbClr val="808080"/>
+                </a:solidFill>
+                <a:latin typeface="Consolas"/>
+              </a:rPr>
+              <a:t>sysroot</a:t>
+            </a:r>
+            <a:r>
+              <a:rPr sz="1400" i="1" dirty="0">
+                <a:solidFill>
+                  <a:srgbClr val="808080"/>
+                </a:solidFill>
+                <a:latin typeface="Consolas"/>
+              </a:rPr>
+              <a:t>=/opt/poky/5.0/</a:t>
+            </a:r>
+            <a:r>
+              <a:rPr sz="1400" i="1" dirty="0" err="1">
+                <a:solidFill>
+                  <a:srgbClr val="808080"/>
+                </a:solidFill>
+                <a:latin typeface="Consolas"/>
+              </a:rPr>
+              <a:t>sysroots</a:t>
+            </a:r>
+            <a:r>
+              <a:rPr sz="1400" i="1" dirty="0">
+                <a:solidFill>
+                  <a:srgbClr val="808080"/>
+                </a:solidFill>
+                <a:latin typeface="Consolas"/>
+              </a:rPr>
+              <a:t>/cortexa72-poky-linux</a:t>
             </a:r>
           </a:p>
         </p:txBody>
@@ -5708,8 +6780,8 @@
 </p:sld>
 </file>
 
-<file path=ppt/slides/slide11.xml><?xml version="1.0" encoding="utf-8"?>
-<p:sld xmlns:a="http://schemas.openxmlformats.org/drawingml/2006/main" xmlns:p="http://schemas.openxmlformats.org/presentationml/2006/main" xmlns:r="http://schemas.openxmlformats.org/officeDocument/2006/relationships">
+<file path=ppt/slides/slide5.xml><?xml version="1.0" encoding="utf-8"?>
+<p:sld xmlns:a="http://schemas.openxmlformats.org/drawingml/2006/main" xmlns:r="http://schemas.openxmlformats.org/officeDocument/2006/relationships" xmlns:p="http://schemas.openxmlformats.org/presentationml/2006/main">
   <p:cSld>
     <p:spTree>
       <p:nvGrpSpPr>
@@ -5717,7 +6789,14 @@
         <p:cNvGrpSpPr/>
         <p:nvPr/>
       </p:nvGrpSpPr>
-      <p:grpSpPr/>
+      <p:grpSpPr>
+        <a:xfrm>
+          <a:off x="0" y="0"/>
+          <a:ext cx="0" cy="0"/>
+          <a:chOff x="0" y="0"/>
+          <a:chExt cx="0" cy="0"/>
+        </a:xfrm>
+      </p:grpSpPr>
       <p:sp>
         <p:nvSpPr>
           <p:cNvPr id="2" name="Title 1"/>
@@ -5734,10 +6813,7 @@
           <a:lstStyle/>
           <a:p>
             <a:r>
-              <a:rPr sz="3200" b="1">
-                <a:solidFill>
-                  <a:srgbClr val="CC0066"/>
-                </a:solidFill>
+              <a:rPr sz="3200" b="1" dirty="0">
                 <a:latin typeface="Calibri"/>
               </a:rPr>
               <a:t>Using the SDK</a:t>
@@ -5762,7 +6838,7 @@
           <a:noFill/>
         </p:spPr>
         <p:txBody>
-          <a:bodyPr wrap="square" anchor="t" lIns="45720" rIns="45720">
+          <a:bodyPr wrap="square" lIns="45720" rIns="45720" anchor="t">
             <a:spAutoFit/>
           </a:bodyPr>
           <a:lstStyle/>
@@ -5823,6 +6899,7 @@
           <a:lstStyle/>
           <a:p>
             <a:pPr algn="ctr"/>
+            <a:endParaRPr/>
           </a:p>
         </p:txBody>
       </p:sp>
@@ -5867,6 +6944,7 @@
           <a:lstStyle/>
           <a:p>
             <a:pPr algn="ctr"/>
+            <a:endParaRPr/>
           </a:p>
         </p:txBody>
       </p:sp>
@@ -5879,7 +6957,7 @@
         <p:spPr>
           <a:xfrm>
             <a:off x="1005840" y="1874519"/>
-            <a:ext cx="10241280" cy="4389120"/>
+            <a:ext cx="10241280" cy="4185761"/>
           </a:xfrm>
           <a:prstGeom prst="rect">
             <a:avLst/>
@@ -5898,7 +6976,7 @@
               </a:spcAft>
             </a:pPr>
             <a:r>
-              <a:rPr sz="1100" i="1">
+              <a:rPr sz="1400" i="1">
                 <a:solidFill>
                   <a:srgbClr val="808080"/>
                 </a:solidFill>
@@ -5914,7 +6992,7 @@
               </a:spcAft>
             </a:pPr>
             <a:r>
-              <a:rPr sz="1100">
+              <a:rPr sz="1400">
                 <a:solidFill>
                   <a:srgbClr val="2D2D2D"/>
                 </a:solidFill>
@@ -5930,7 +7008,7 @@
               </a:spcAft>
             </a:pPr>
             <a:r>
-              <a:rPr sz="1100" i="1">
+              <a:rPr sz="1400" i="1">
                 <a:solidFill>
                   <a:srgbClr val="808080"/>
                 </a:solidFill>
@@ -5946,7 +7024,7 @@
               </a:spcAft>
             </a:pPr>
             <a:r>
-              <a:rPr sz="1100">
+              <a:rPr sz="1400">
                 <a:solidFill>
                   <a:srgbClr val="2D2D2D"/>
                 </a:solidFill>
@@ -5962,7 +7040,7 @@
               </a:spcAft>
             </a:pPr>
             <a:r>
-              <a:rPr sz="1100">
+              <a:rPr sz="1400">
                 <a:solidFill>
                   <a:srgbClr val="2D2D2D"/>
                 </a:solidFill>
@@ -5978,7 +7056,7 @@
               </a:spcAft>
             </a:pPr>
             <a:r>
-              <a:rPr sz="1100">
+              <a:rPr sz="1400">
                 <a:solidFill>
                   <a:srgbClr val="2D2D2D"/>
                 </a:solidFill>
@@ -5994,7 +7072,7 @@
               </a:spcAft>
             </a:pPr>
             <a:r>
-              <a:rPr sz="1100">
+              <a:rPr sz="1400">
                 <a:solidFill>
                   <a:srgbClr val="2D2D2D"/>
                 </a:solidFill>
@@ -6010,7 +7088,7 @@
               </a:spcAft>
             </a:pPr>
             <a:r>
-              <a:rPr sz="1100" i="1">
+              <a:rPr sz="1400" i="1">
                 <a:solidFill>
                   <a:srgbClr val="808080"/>
                 </a:solidFill>
@@ -6026,7 +7104,7 @@
               </a:spcAft>
             </a:pPr>
             <a:r>
-              <a:rPr sz="1100">
+              <a:rPr sz="1400">
                 <a:solidFill>
                   <a:srgbClr val="2D2D2D"/>
                 </a:solidFill>
@@ -6042,7 +7120,7 @@
               </a:spcAft>
             </a:pPr>
             <a:r>
-              <a:rPr sz="1100">
+              <a:rPr sz="1400">
                 <a:solidFill>
                   <a:srgbClr val="2D2D2D"/>
                 </a:solidFill>
@@ -6058,7 +7136,7 @@
               </a:spcAft>
             </a:pPr>
             <a:r>
-              <a:rPr sz="1100">
+              <a:rPr sz="1400">
                 <a:solidFill>
                   <a:srgbClr val="2D2D2D"/>
                 </a:solidFill>
@@ -6074,7 +7152,7 @@
               </a:spcAft>
             </a:pPr>
             <a:r>
-              <a:rPr sz="1100" i="1">
+              <a:rPr sz="1400" i="1">
                 <a:solidFill>
                   <a:srgbClr val="808080"/>
                 </a:solidFill>
@@ -6090,7 +7168,7 @@
               </a:spcAft>
             </a:pPr>
             <a:r>
-              <a:rPr sz="1100">
+              <a:rPr sz="1400">
                 <a:solidFill>
                   <a:srgbClr val="2D2D2D"/>
                 </a:solidFill>
@@ -6106,7 +7184,7 @@
               </a:spcAft>
             </a:pPr>
             <a:r>
-              <a:rPr sz="1100">
+              <a:rPr sz="1400">
                 <a:solidFill>
                   <a:srgbClr val="2D2D2D"/>
                 </a:solidFill>
@@ -6122,7 +7200,7 @@
               </a:spcAft>
             </a:pPr>
             <a:r>
-              <a:rPr sz="1100" i="1">
+              <a:rPr sz="1400" i="1">
                 <a:solidFill>
                   <a:srgbClr val="808080"/>
                 </a:solidFill>
@@ -6138,7 +7216,7 @@
               </a:spcAft>
             </a:pPr>
             <a:r>
-              <a:rPr sz="1100">
+              <a:rPr sz="1400">
                 <a:solidFill>
                   <a:srgbClr val="2D2D2D"/>
                 </a:solidFill>
@@ -6154,7 +7232,7 @@
               </a:spcAft>
             </a:pPr>
             <a:r>
-              <a:rPr sz="1100">
+              <a:rPr sz="1400">
                 <a:solidFill>
                   <a:srgbClr val="2D2D2D"/>
                 </a:solidFill>
@@ -6170,7 +7248,7 @@
               </a:spcAft>
             </a:pPr>
             <a:r>
-              <a:rPr sz="1100" i="1">
+              <a:rPr sz="1400" i="1">
                 <a:solidFill>
                   <a:srgbClr val="808080"/>
                 </a:solidFill>
@@ -6186,7 +7264,7 @@
               </a:spcAft>
             </a:pPr>
             <a:r>
-              <a:rPr sz="1100">
+              <a:rPr sz="1400">
                 <a:solidFill>
                   <a:srgbClr val="2D2D2D"/>
                 </a:solidFill>
@@ -6205,8 +7283,8 @@
 </p:sld>
 </file>
 
-<file path=ppt/slides/slide12.xml><?xml version="1.0" encoding="utf-8"?>
-<p:sld xmlns:a="http://schemas.openxmlformats.org/drawingml/2006/main" xmlns:p="http://schemas.openxmlformats.org/presentationml/2006/main" xmlns:r="http://schemas.openxmlformats.org/officeDocument/2006/relationships">
+<file path=ppt/slides/slide6.xml><?xml version="1.0" encoding="utf-8"?>
+<p:sld xmlns:a="http://schemas.openxmlformats.org/drawingml/2006/main" xmlns:r="http://schemas.openxmlformats.org/officeDocument/2006/relationships" xmlns:p="http://schemas.openxmlformats.org/presentationml/2006/main">
   <p:cSld>
     <p:spTree>
       <p:nvGrpSpPr>
@@ -6214,7 +7292,14 @@
         <p:cNvGrpSpPr/>
         <p:nvPr/>
       </p:nvGrpSpPr>
-      <p:grpSpPr/>
+      <p:grpSpPr>
+        <a:xfrm>
+          <a:off x="0" y="0"/>
+          <a:ext cx="0" cy="0"/>
+          <a:chOff x="0" y="0"/>
+          <a:chExt cx="0" cy="0"/>
+        </a:xfrm>
+      </p:grpSpPr>
       <p:sp>
         <p:nvSpPr>
           <p:cNvPr id="2" name="Title 1"/>
@@ -6231,13 +7316,28 @@
           <a:lstStyle/>
           <a:p>
             <a:r>
-              <a:rPr sz="3200" b="1">
-                <a:solidFill>
-                  <a:srgbClr val="CC0066"/>
-                </a:solidFill>
-                <a:latin typeface="Calibri"/>
-              </a:rPr>
-              <a:t>devtool — Recipe Workflow</a:t>
+              <a:rPr lang="en-IN" sz="3200" b="1" dirty="0">
+                <a:latin typeface="Calibri"/>
+              </a:rPr>
+              <a:t>D</a:t>
+            </a:r>
+            <a:r>
+              <a:rPr sz="3200" b="1" dirty="0" err="1">
+                <a:latin typeface="Calibri"/>
+              </a:rPr>
+              <a:t>evtool</a:t>
+            </a:r>
+            <a:r>
+              <a:rPr lang="en-IN" sz="3200" b="1" dirty="0">
+                <a:latin typeface="Calibri"/>
+              </a:rPr>
+              <a:t>: </a:t>
+            </a:r>
+            <a:r>
+              <a:rPr sz="3200" b="1" dirty="0">
+                <a:latin typeface="Calibri"/>
+              </a:rPr>
+              <a:t>Recipe Workflow</a:t>
             </a:r>
           </a:p>
         </p:txBody>
@@ -6251,7 +7351,7 @@
         <p:spPr>
           <a:xfrm>
             <a:off x="822960" y="1417320"/>
-            <a:ext cx="10515600" cy="365760"/>
+            <a:ext cx="10515600" cy="323165"/>
           </a:xfrm>
           <a:prstGeom prst="rect">
             <a:avLst/>
@@ -6259,20 +7359,56 @@
           <a:noFill/>
         </p:spPr>
         <p:txBody>
-          <a:bodyPr wrap="square" anchor="t" lIns="45720" rIns="45720">
+          <a:bodyPr wrap="square" lIns="45720" rIns="45720" anchor="t">
             <a:spAutoFit/>
           </a:bodyPr>
           <a:lstStyle/>
           <a:p>
             <a:pPr algn="l"/>
             <a:r>
-              <a:rPr sz="1500" b="0" i="1">
+              <a:rPr sz="1500" b="0" i="1" dirty="0">
                 <a:solidFill>
                   <a:srgbClr val="666666"/>
                 </a:solidFill>
                 <a:latin typeface="Calibri"/>
               </a:rPr>
-              <a:t>Modify upstream code, rebuild, deploy, commit changes — all without leaving devtool.</a:t>
+              <a:t>Modify upstream code, rebuild, deploy, commit changes</a:t>
+            </a:r>
+            <a:r>
+              <a:rPr lang="en-IN" sz="1500" b="0" i="1" dirty="0">
+                <a:solidFill>
+                  <a:srgbClr val="666666"/>
+                </a:solidFill>
+                <a:latin typeface="Calibri"/>
+              </a:rPr>
+              <a:t>,</a:t>
+            </a:r>
+            <a:r>
+              <a:rPr sz="1500" b="0" i="1" dirty="0">
+                <a:solidFill>
+                  <a:srgbClr val="666666"/>
+                </a:solidFill>
+                <a:latin typeface="Calibri"/>
+              </a:rPr>
+              <a:t> all without leaving </a:t>
+            </a:r>
+            <a:r>
+              <a:rPr sz="1500" b="0" i="1" dirty="0" err="1">
+                <a:solidFill>
+                  <a:srgbClr val="666666"/>
+                </a:solidFill>
+                <a:latin typeface="Calibri"/>
+              </a:rPr>
+              <a:t>devtool</a:t>
+            </a:r>
+            <a:r>
+              <a:rPr sz="1500" b="0" i="1" dirty="0">
+                <a:solidFill>
+                  <a:srgbClr val="666666"/>
+                </a:solidFill>
+                <a:latin typeface="Calibri"/>
+              </a:rPr>
+              <a:t>.</a:t>
             </a:r>
           </a:p>
         </p:txBody>
@@ -6320,6 +7456,7 @@
           <a:lstStyle/>
           <a:p>
             <a:pPr algn="ctr"/>
+            <a:endParaRPr/>
           </a:p>
         </p:txBody>
       </p:sp>
@@ -6364,6 +7501,7 @@
           <a:lstStyle/>
           <a:p>
             <a:pPr algn="ctr"/>
+            <a:endParaRPr/>
           </a:p>
         </p:txBody>
       </p:sp>
@@ -6376,7 +7514,7 @@
         <p:spPr>
           <a:xfrm>
             <a:off x="1005840" y="1874519"/>
-            <a:ext cx="10241280" cy="4389120"/>
+            <a:ext cx="10241280" cy="4339650"/>
           </a:xfrm>
           <a:prstGeom prst="rect">
             <a:avLst/>
@@ -6395,7 +7533,7 @@
               </a:spcAft>
             </a:pPr>
             <a:r>
-              <a:rPr sz="1000" i="1">
+              <a:rPr sz="1200" i="1">
                 <a:solidFill>
                   <a:srgbClr val="808080"/>
                 </a:solidFill>
@@ -6411,7 +7549,7 @@
               </a:spcAft>
             </a:pPr>
             <a:r>
-              <a:rPr sz="1000">
+              <a:rPr sz="1200">
                 <a:solidFill>
                   <a:srgbClr val="2D2D2D"/>
                 </a:solidFill>
@@ -6427,7 +7565,7 @@
               </a:spcAft>
             </a:pPr>
             <a:r>
-              <a:rPr sz="1000">
+              <a:rPr sz="1200">
                 <a:solidFill>
                   <a:srgbClr val="2D2D2D"/>
                 </a:solidFill>
@@ -6443,7 +7581,7 @@
               </a:spcAft>
             </a:pPr>
             <a:r>
-              <a:rPr sz="1000" i="1">
+              <a:rPr sz="1200" i="1">
                 <a:solidFill>
                   <a:srgbClr val="808080"/>
                 </a:solidFill>
@@ -6459,7 +7597,7 @@
               </a:spcAft>
             </a:pPr>
             <a:r>
-              <a:rPr sz="1000">
+              <a:rPr sz="1200">
                 <a:solidFill>
                   <a:srgbClr val="2D2D2D"/>
                 </a:solidFill>
@@ -6475,7 +7613,7 @@
               </a:spcAft>
             </a:pPr>
             <a:r>
-              <a:rPr sz="1000" i="1">
+              <a:rPr sz="1200" i="1">
                 <a:solidFill>
                   <a:srgbClr val="808080"/>
                 </a:solidFill>
@@ -6491,7 +7629,7 @@
               </a:spcAft>
             </a:pPr>
             <a:r>
-              <a:rPr sz="1000">
+              <a:rPr sz="1200">
                 <a:solidFill>
                   <a:srgbClr val="2D2D2D"/>
                 </a:solidFill>
@@ -6507,7 +7645,7 @@
               </a:spcAft>
             </a:pPr>
             <a:r>
-              <a:rPr sz="1000" i="1">
+              <a:rPr sz="1200" i="1">
                 <a:solidFill>
                   <a:srgbClr val="808080"/>
                 </a:solidFill>
@@ -6523,7 +7661,7 @@
               </a:spcAft>
             </a:pPr>
             <a:r>
-              <a:rPr sz="1000">
+              <a:rPr sz="1200">
                 <a:solidFill>
                   <a:srgbClr val="2D2D2D"/>
                 </a:solidFill>
@@ -6539,7 +7677,7 @@
               </a:spcAft>
             </a:pPr>
             <a:r>
-              <a:rPr sz="1000" i="1">
+              <a:rPr sz="1200" i="1">
                 <a:solidFill>
                   <a:srgbClr val="808080"/>
                 </a:solidFill>
@@ -6555,7 +7693,7 @@
               </a:spcAft>
             </a:pPr>
             <a:r>
-              <a:rPr sz="1000" i="1">
+              <a:rPr sz="1200" i="1">
                 <a:solidFill>
                   <a:srgbClr val="808080"/>
                 </a:solidFill>
@@ -6571,7 +7709,7 @@
               </a:spcAft>
             </a:pPr>
             <a:r>
-              <a:rPr sz="1000">
+              <a:rPr sz="1200">
                 <a:solidFill>
                   <a:srgbClr val="2D2D2D"/>
                 </a:solidFill>
@@ -6587,7 +7725,7 @@
               </a:spcAft>
             </a:pPr>
             <a:r>
-              <a:rPr sz="1000" i="1">
+              <a:rPr sz="1200" i="1">
                 <a:solidFill>
                   <a:srgbClr val="808080"/>
                 </a:solidFill>
@@ -6603,7 +7741,7 @@
               </a:spcAft>
             </a:pPr>
             <a:r>
-              <a:rPr sz="1000">
+              <a:rPr sz="1200">
                 <a:solidFill>
                   <a:srgbClr val="2D2D2D"/>
                 </a:solidFill>
@@ -6619,7 +7757,7 @@
               </a:spcAft>
             </a:pPr>
             <a:r>
-              <a:rPr sz="1000">
+              <a:rPr sz="1200">
                 <a:solidFill>
                   <a:srgbClr val="2D2D2D"/>
                 </a:solidFill>
@@ -6635,7 +7773,7 @@
               </a:spcAft>
             </a:pPr>
             <a:r>
-              <a:rPr sz="1000" i="1">
+              <a:rPr sz="1200" i="1">
                 <a:solidFill>
                   <a:srgbClr val="808080"/>
                 </a:solidFill>
@@ -6651,7 +7789,7 @@
               </a:spcAft>
             </a:pPr>
             <a:r>
-              <a:rPr sz="1000">
+              <a:rPr sz="1200">
                 <a:solidFill>
                   <a:srgbClr val="2D2D2D"/>
                 </a:solidFill>
@@ -6667,7 +7805,7 @@
               </a:spcAft>
             </a:pPr>
             <a:r>
-              <a:rPr sz="1000" i="1">
+              <a:rPr sz="1200" i="1">
                 <a:solidFill>
                   <a:srgbClr val="808080"/>
                 </a:solidFill>
@@ -6683,7 +7821,7 @@
               </a:spcAft>
             </a:pPr>
             <a:r>
-              <a:rPr sz="1000">
+              <a:rPr sz="1200">
                 <a:solidFill>
                   <a:srgbClr val="2D2D2D"/>
                 </a:solidFill>
@@ -6699,7 +7837,7 @@
               </a:spcAft>
             </a:pPr>
             <a:r>
-              <a:rPr sz="1000" i="1">
+              <a:rPr sz="1200" i="1">
                 <a:solidFill>
                   <a:srgbClr val="808080"/>
                 </a:solidFill>
@@ -6715,7 +7853,7 @@
               </a:spcAft>
             </a:pPr>
             <a:r>
-              <a:rPr sz="1000">
+              <a:rPr sz="1200">
                 <a:solidFill>
                   <a:srgbClr val="2D2D2D"/>
                 </a:solidFill>
@@ -6731,7 +7869,7 @@
               </a:spcAft>
             </a:pPr>
             <a:r>
-              <a:rPr sz="1000" i="1">
+              <a:rPr sz="1200" i="1">
                 <a:solidFill>
                   <a:srgbClr val="808080"/>
                 </a:solidFill>
@@ -6747,7 +7885,7 @@
               </a:spcAft>
             </a:pPr>
             <a:r>
-              <a:rPr sz="1000">
+              <a:rPr sz="1200">
                 <a:solidFill>
                   <a:srgbClr val="2D2D2D"/>
                 </a:solidFill>
@@ -6766,8 +7904,8 @@
 </p:sld>
 </file>
 
-<file path=ppt/slides/slide13.xml><?xml version="1.0" encoding="utf-8"?>
-<p:sld xmlns:a="http://schemas.openxmlformats.org/drawingml/2006/main" xmlns:p="http://schemas.openxmlformats.org/presentationml/2006/main" xmlns:r="http://schemas.openxmlformats.org/officeDocument/2006/relationships">
+<file path=ppt/slides/slide7.xml><?xml version="1.0" encoding="utf-8"?>
+<p:sld xmlns:a="http://schemas.openxmlformats.org/drawingml/2006/main" xmlns:r="http://schemas.openxmlformats.org/officeDocument/2006/relationships" xmlns:p="http://schemas.openxmlformats.org/presentationml/2006/main">
   <p:cSld>
     <p:spTree>
       <p:nvGrpSpPr>
@@ -6775,7 +7913,14 @@
         <p:cNvGrpSpPr/>
         <p:nvPr/>
       </p:nvGrpSpPr>
-      <p:grpSpPr/>
+      <p:grpSpPr>
+        <a:xfrm>
+          <a:off x="0" y="0"/>
+          <a:ext cx="0" cy="0"/>
+          <a:chOff x="0" y="0"/>
+          <a:chExt cx="0" cy="0"/>
+        </a:xfrm>
+      </p:grpSpPr>
       <p:sp>
         <p:nvSpPr>
           <p:cNvPr id="2" name="Title 1"/>
@@ -6792,10 +7937,7 @@
           <a:lstStyle/>
           <a:p>
             <a:r>
-              <a:rPr sz="3200" b="1">
-                <a:solidFill>
-                  <a:srgbClr val="CC0066"/>
-                </a:solidFill>
+              <a:rPr sz="3200" b="1" dirty="0">
                 <a:latin typeface="Calibri"/>
               </a:rPr>
               <a:t>Team Workflow Patterns</a:t>
@@ -6820,7 +7962,7 @@
           <a:noFill/>
         </p:spPr>
         <p:txBody>
-          <a:bodyPr wrap="square" anchor="t" lIns="45720" rIns="45720">
+          <a:bodyPr wrap="square" lIns="45720" rIns="45720" anchor="t">
             <a:spAutoFit/>
           </a:bodyPr>
           <a:lstStyle/>
@@ -6847,7 +7989,7 @@
         <p:spPr>
           <a:xfrm>
             <a:off x="822960" y="1783080"/>
-            <a:ext cx="10515600" cy="4572000"/>
+            <a:ext cx="10515600" cy="2775119"/>
           </a:xfrm>
           <a:prstGeom prst="rect">
             <a:avLst/>
@@ -6866,7 +8008,7 @@
               </a:spcAft>
             </a:pPr>
             <a:r>
-              <a:rPr sz="1500" b="1" i="0">
+              <a:rPr b="1" i="0" dirty="0">
                 <a:solidFill>
                   <a:srgbClr val="CC0066"/>
                 </a:solidFill>
@@ -6882,13 +8024,49 @@
               </a:spcAft>
             </a:pPr>
             <a:r>
-              <a:rPr sz="1300" b="0" i="0">
+              <a:rPr sz="1600" b="0" i="0" dirty="0">
                 <a:solidFill>
                   <a:srgbClr val="333333"/>
                 </a:solidFill>
                 <a:latin typeface="Calibri"/>
               </a:rPr>
-              <a:t>Platform team maintains the Yocto build; ships an SDK quarterly. App team uses the SDK, never touches Yocto.</a:t>
+              <a:t>Platform team maintains the </a:t>
+            </a:r>
+            <a:r>
+              <a:rPr sz="1600" b="0" i="0" dirty="0" err="1">
+                <a:solidFill>
+                  <a:srgbClr val="333333"/>
+                </a:solidFill>
+                <a:latin typeface="Calibri"/>
+              </a:rPr>
+              <a:t>Yocto</a:t>
+            </a:r>
+            <a:r>
+              <a:rPr sz="1600" b="0" i="0" dirty="0">
+                <a:solidFill>
+                  <a:srgbClr val="333333"/>
+                </a:solidFill>
+                <a:latin typeface="Calibri"/>
+              </a:rPr>
+              <a:t> build; ships an SDK quarterly. App team uses the SDK, never touches </a:t>
+            </a:r>
+            <a:r>
+              <a:rPr sz="1600" b="0" i="0" dirty="0" err="1">
+                <a:solidFill>
+                  <a:srgbClr val="333333"/>
+                </a:solidFill>
+                <a:latin typeface="Calibri"/>
+              </a:rPr>
+              <a:t>Yocto</a:t>
+            </a:r>
+            <a:r>
+              <a:rPr sz="1600" b="0" i="0" dirty="0">
+                <a:solidFill>
+                  <a:srgbClr val="333333"/>
+                </a:solidFill>
+                <a:latin typeface="Calibri"/>
+              </a:rPr>
+              <a:t>.</a:t>
             </a:r>
           </a:p>
           <a:p>
@@ -6898,14 +8076,29 @@
               </a:spcAft>
             </a:pPr>
             <a:r>
-              <a:rPr sz="1500" b="1" i="0">
+              <a:rPr b="1" i="0" dirty="0">
                 <a:solidFill>
                   <a:srgbClr val="CC0066"/>
                 </a:solidFill>
                 <a:latin typeface="Calibri"/>
               </a:rPr>
-              <a:t>Pattern 2: Everyone uses the eSDK</a:t>
-            </a:r>
+              <a:t>Pattern 2: Everyone uses the </a:t>
+            </a:r>
+            <a:r>
+              <a:rPr b="1" i="0" dirty="0" err="1">
+                <a:solidFill>
+                  <a:srgbClr val="CC0066"/>
+                </a:solidFill>
+                <a:latin typeface="Calibri"/>
+              </a:rPr>
+              <a:t>eSDK</a:t>
+            </a:r>
+            <a:endParaRPr b="1" i="0" dirty="0">
+              <a:solidFill>
+                <a:srgbClr val="CC0066"/>
+              </a:solidFill>
+              <a:latin typeface="Calibri"/>
+            </a:endParaRPr>
           </a:p>
           <a:p>
             <a:pPr>
@@ -6914,13 +8107,67 @@
               </a:spcAft>
             </a:pPr>
             <a:r>
-              <a:rPr sz="1300" b="0" i="0">
+              <a:rPr sz="1600" b="0" i="0" dirty="0">
                 <a:solidFill>
                   <a:srgbClr val="333333"/>
                 </a:solidFill>
                 <a:latin typeface="Calibri"/>
               </a:rPr>
-              <a:t>Smaller teams. Everyone gets the eSDK; devtool is used for ad-hoc recipe work; full Yocto for releases.</a:t>
+              <a:t>Smaller teams. Everyone gets the </a:t>
+            </a:r>
+            <a:r>
+              <a:rPr sz="1600" b="0" i="0" dirty="0" err="1">
+                <a:solidFill>
+                  <a:srgbClr val="333333"/>
+                </a:solidFill>
+                <a:latin typeface="Calibri"/>
+              </a:rPr>
+              <a:t>eSDK</a:t>
+            </a:r>
+            <a:r>
+              <a:rPr sz="1600" b="0" i="0" dirty="0">
+                <a:solidFill>
+                  <a:srgbClr val="333333"/>
+                </a:solidFill>
+                <a:latin typeface="Calibri"/>
+              </a:rPr>
+              <a:t>; </a:t>
+            </a:r>
+            <a:r>
+              <a:rPr sz="1600" b="0" i="0" dirty="0" err="1">
+                <a:solidFill>
+                  <a:srgbClr val="333333"/>
+                </a:solidFill>
+                <a:latin typeface="Calibri"/>
+              </a:rPr>
+              <a:t>devtool</a:t>
+            </a:r>
+            <a:r>
+              <a:rPr sz="1600" b="0" i="0" dirty="0">
+                <a:solidFill>
+                  <a:srgbClr val="333333"/>
+                </a:solidFill>
+                <a:latin typeface="Calibri"/>
+              </a:rPr>
+              <a:t> is used for ad-hoc recipe work; full </a:t>
+            </a:r>
+            <a:r>
+              <a:rPr sz="1600" b="0" i="0" dirty="0" err="1">
+                <a:solidFill>
+                  <a:srgbClr val="333333"/>
+                </a:solidFill>
+                <a:latin typeface="Calibri"/>
+              </a:rPr>
+              <a:t>Yocto</a:t>
+            </a:r>
+            <a:r>
+              <a:rPr sz="1600" b="0" i="0" dirty="0">
+                <a:solidFill>
+                  <a:srgbClr val="333333"/>
+                </a:solidFill>
+                <a:latin typeface="Calibri"/>
+              </a:rPr>
+              <a:t> for releases.</a:t>
             </a:r>
           </a:p>
           <a:p>
@@ -6930,14 +8177,47 @@
               </a:spcAft>
             </a:pPr>
             <a:r>
-              <a:rPr sz="1500" b="1" i="0">
+              <a:rPr b="1" i="0" dirty="0">
                 <a:solidFill>
                   <a:srgbClr val="CC0066"/>
                 </a:solidFill>
                 <a:latin typeface="Calibri"/>
               </a:rPr>
-              <a:t>Pattern 3: CI builds, devs use sstate</a:t>
-            </a:r>
+              <a:t>Pattern 3: CI builds, </a:t>
+            </a:r>
+            <a:r>
+              <a:rPr b="1" i="0" dirty="0" err="1">
+                <a:solidFill>
+                  <a:srgbClr val="CC0066"/>
+                </a:solidFill>
+                <a:latin typeface="Calibri"/>
+              </a:rPr>
+              <a:t>devs</a:t>
+            </a:r>
+            <a:r>
+              <a:rPr b="1" i="0" dirty="0">
+                <a:solidFill>
+                  <a:srgbClr val="CC0066"/>
+                </a:solidFill>
+                <a:latin typeface="Calibri"/>
+              </a:rPr>
+              <a:t> use </a:t>
+            </a:r>
+            <a:r>
+              <a:rPr b="1" i="0" dirty="0" err="1">
+                <a:solidFill>
+                  <a:srgbClr val="CC0066"/>
+                </a:solidFill>
+                <a:latin typeface="Calibri"/>
+              </a:rPr>
+              <a:t>sstate</a:t>
+            </a:r>
+            <a:endParaRPr b="1" i="0" dirty="0">
+              <a:solidFill>
+                <a:srgbClr val="CC0066"/>
+              </a:solidFill>
+              <a:latin typeface="Calibri"/>
+            </a:endParaRPr>
           </a:p>
           <a:p>
             <a:pPr>
@@ -6946,13 +8226,49 @@
               </a:spcAft>
             </a:pPr>
             <a:r>
-              <a:rPr sz="1300" b="0" i="0">
+              <a:rPr sz="1600" b="0" i="0" dirty="0">
                 <a:solidFill>
                   <a:srgbClr val="333333"/>
                 </a:solidFill>
                 <a:latin typeface="Calibri"/>
               </a:rPr>
-              <a:t>CI runs full Yocto builds every commit. SSTATE_MIRRORS lets devs benefit. Devs typically only rebuild what they touched.</a:t>
+              <a:t>CI runs full </a:t>
+            </a:r>
+            <a:r>
+              <a:rPr sz="1600" b="0" i="0" dirty="0" err="1">
+                <a:solidFill>
+                  <a:srgbClr val="333333"/>
+                </a:solidFill>
+                <a:latin typeface="Calibri"/>
+              </a:rPr>
+              <a:t>Yocto</a:t>
+            </a:r>
+            <a:r>
+              <a:rPr sz="1600" b="0" i="0" dirty="0">
+                <a:solidFill>
+                  <a:srgbClr val="333333"/>
+                </a:solidFill>
+                <a:latin typeface="Calibri"/>
+              </a:rPr>
+              <a:t> builds every commit. SSTATE_MIRRORS lets </a:t>
+            </a:r>
+            <a:r>
+              <a:rPr sz="1600" b="0" i="0" dirty="0" err="1">
+                <a:solidFill>
+                  <a:srgbClr val="333333"/>
+                </a:solidFill>
+                <a:latin typeface="Calibri"/>
+              </a:rPr>
+              <a:t>devs</a:t>
+            </a:r>
+            <a:r>
+              <a:rPr sz="1600" b="0" i="0" dirty="0">
+                <a:solidFill>
+                  <a:srgbClr val="333333"/>
+                </a:solidFill>
+                <a:latin typeface="Calibri"/>
+              </a:rPr>
+              <a:t> benefit. Devs typically only rebuild what they touched.</a:t>
             </a:r>
           </a:p>
           <a:p>
@@ -6962,13 +8278,31 @@
               </a:spcAft>
             </a:pPr>
             <a:r>
-              <a:rPr sz="1500" b="1" i="0">
+              <a:rPr b="1" i="0" dirty="0">
                 <a:solidFill>
                   <a:srgbClr val="663399"/>
                 </a:solidFill>
                 <a:latin typeface="Calibri"/>
               </a:rPr>
-              <a:t>Anti-pattern: 'Yocto is the platform team's problem'</a:t>
+              <a:t>Anti-pattern: '</a:t>
+            </a:r>
+            <a:r>
+              <a:rPr b="1" i="0" dirty="0" err="1">
+                <a:solidFill>
+                  <a:srgbClr val="663399"/>
+                </a:solidFill>
+                <a:latin typeface="Calibri"/>
+              </a:rPr>
+              <a:t>Yocto</a:t>
+            </a:r>
+            <a:r>
+              <a:rPr b="1" i="0" dirty="0">
+                <a:solidFill>
+                  <a:srgbClr val="663399"/>
+                </a:solidFill>
+                <a:latin typeface="Calibri"/>
+              </a:rPr>
+              <a:t> is the platform team's problem'</a:t>
             </a:r>
           </a:p>
           <a:p>
@@ -6978,13 +8312,49 @@
               </a:spcAft>
             </a:pPr>
             <a:r>
-              <a:rPr sz="1300" b="0" i="0">
+              <a:rPr sz="1600" b="0" i="0" dirty="0">
                 <a:solidFill>
                   <a:srgbClr val="333333"/>
                 </a:solidFill>
                 <a:latin typeface="Calibri"/>
               </a:rPr>
-              <a:t>This creates silos. App devs end up unable to debug runtime issues. Train at least one app dev per team to use devtool.</a:t>
+              <a:t>This creates silos. App </a:t>
+            </a:r>
+            <a:r>
+              <a:rPr sz="1600" b="0" i="0" dirty="0" err="1">
+                <a:solidFill>
+                  <a:srgbClr val="333333"/>
+                </a:solidFill>
+                <a:latin typeface="Calibri"/>
+              </a:rPr>
+              <a:t>devs</a:t>
+            </a:r>
+            <a:r>
+              <a:rPr sz="1600" b="0" i="0" dirty="0">
+                <a:solidFill>
+                  <a:srgbClr val="333333"/>
+                </a:solidFill>
+                <a:latin typeface="Calibri"/>
+              </a:rPr>
+              <a:t> end up unable to debug runtime issues. Train at least one app dev per team to use </a:t>
+            </a:r>
+            <a:r>
+              <a:rPr sz="1600" b="0" i="0" dirty="0" err="1">
+                <a:solidFill>
+                  <a:srgbClr val="333333"/>
+                </a:solidFill>
+                <a:latin typeface="Calibri"/>
+              </a:rPr>
+              <a:t>devtool</a:t>
+            </a:r>
+            <a:r>
+              <a:rPr sz="1600" b="0" i="0" dirty="0">
+                <a:solidFill>
+                  <a:srgbClr val="333333"/>
+                </a:solidFill>
+                <a:latin typeface="Calibri"/>
+              </a:rPr>
+              <a:t>.</a:t>
             </a:r>
           </a:p>
         </p:txBody>
@@ -6997,8 +8367,8 @@
 </p:sld>
 </file>
 
-<file path=ppt/slides/slide14.xml><?xml version="1.0" encoding="utf-8"?>
-<p:sld xmlns:a="http://schemas.openxmlformats.org/drawingml/2006/main" xmlns:p="http://schemas.openxmlformats.org/presentationml/2006/main" xmlns:r="http://schemas.openxmlformats.org/officeDocument/2006/relationships">
+<file path=ppt/slides/slide8.xml><?xml version="1.0" encoding="utf-8"?>
+<p:sld xmlns:a="http://schemas.openxmlformats.org/drawingml/2006/main" xmlns:r="http://schemas.openxmlformats.org/officeDocument/2006/relationships" xmlns:p="http://schemas.openxmlformats.org/presentationml/2006/main">
   <p:cSld>
     <p:spTree>
       <p:nvGrpSpPr>
@@ -7006,7 +8376,14 @@
         <p:cNvGrpSpPr/>
         <p:nvPr/>
       </p:nvGrpSpPr>
-      <p:grpSpPr/>
+      <p:grpSpPr>
+        <a:xfrm>
+          <a:off x="0" y="0"/>
+          <a:ext cx="0" cy="0"/>
+          <a:chOff x="0" y="0"/>
+          <a:chExt cx="0" cy="0"/>
+        </a:xfrm>
+      </p:grpSpPr>
       <p:sp>
         <p:nvSpPr>
           <p:cNvPr id="2" name="Title 1"/>
@@ -7023,10 +8400,7 @@
           <a:lstStyle/>
           <a:p>
             <a:r>
-              <a:rPr sz="3200" b="1">
-                <a:solidFill>
-                  <a:srgbClr val="CC0066"/>
-                </a:solidFill>
+              <a:rPr sz="3200" b="1" dirty="0">
                 <a:latin typeface="Calibri"/>
               </a:rPr>
               <a:t>IDE and CI Integration</a:t>
@@ -7051,7 +8425,7 @@
           <a:noFill/>
         </p:spPr>
         <p:txBody>
-          <a:bodyPr wrap="square" anchor="t" lIns="45720" rIns="45720">
+          <a:bodyPr wrap="square" lIns="45720" rIns="45720" anchor="t">
             <a:spAutoFit/>
           </a:bodyPr>
           <a:lstStyle/>
@@ -7078,7 +8452,7 @@
         <p:spPr>
           <a:xfrm>
             <a:off x="822960" y="1783080"/>
-            <a:ext cx="10515600" cy="4572000"/>
+            <a:ext cx="10515600" cy="4154984"/>
           </a:xfrm>
           <a:prstGeom prst="rect">
             <a:avLst/>
@@ -7097,7 +8471,7 @@
               </a:spcAft>
             </a:pPr>
             <a:r>
-              <a:rPr sz="1500" b="1" i="0">
+              <a:rPr b="1" i="0">
                 <a:solidFill>
                   <a:srgbClr val="CC0066"/>
                 </a:solidFill>
@@ -7113,7 +8487,7 @@
               </a:spcAft>
             </a:pPr>
             <a:r>
-              <a:rPr sz="1300" b="0" i="0">
+              <a:rPr sz="1600" b="0" i="0">
                 <a:solidFill>
                   <a:srgbClr val="333333"/>
                 </a:solidFill>
@@ -7129,7 +8503,7 @@
               </a:spcAft>
             </a:pPr>
             <a:r>
-              <a:rPr sz="1300" b="0" i="0">
+              <a:rPr sz="1600" b="0" i="0">
                 <a:solidFill>
                   <a:srgbClr val="333333"/>
                 </a:solidFill>
@@ -7145,7 +8519,7 @@
               </a:spcAft>
             </a:pPr>
             <a:r>
-              <a:rPr sz="1300" b="0" i="0">
+              <a:rPr sz="1600" b="0" i="0">
                 <a:solidFill>
                   <a:srgbClr val="333333"/>
                 </a:solidFill>
@@ -7161,7 +8535,7 @@
               </a:spcAft>
             </a:pPr>
             <a:r>
-              <a:rPr sz="1500" b="1" i="0">
+              <a:rPr b="1" i="0">
                 <a:solidFill>
                   <a:srgbClr val="CC0066"/>
                 </a:solidFill>
@@ -7177,7 +8551,7 @@
               </a:spcAft>
             </a:pPr>
             <a:r>
-              <a:rPr sz="1300" b="0" i="0">
+              <a:rPr sz="1600" b="0" i="0">
                 <a:solidFill>
                   <a:srgbClr val="333333"/>
                 </a:solidFill>
@@ -7193,7 +8567,7 @@
               </a:spcAft>
             </a:pPr>
             <a:r>
-              <a:rPr sz="1300" b="0" i="0">
+              <a:rPr sz="1600" b="0" i="0">
                 <a:solidFill>
                   <a:srgbClr val="333333"/>
                 </a:solidFill>
@@ -7209,7 +8583,7 @@
               </a:spcAft>
             </a:pPr>
             <a:r>
-              <a:rPr sz="1500" b="1" i="0">
+              <a:rPr b="1" i="0">
                 <a:solidFill>
                   <a:srgbClr val="663399"/>
                 </a:solidFill>
@@ -7225,7 +8599,7 @@
               </a:spcAft>
             </a:pPr>
             <a:r>
-              <a:rPr sz="1200" b="0" i="0">
+              <a:rPr sz="1600" b="0" i="0">
                 <a:solidFill>
                   <a:srgbClr val="333333"/>
                 </a:solidFill>
@@ -7241,7 +8615,7 @@
               </a:spcAft>
             </a:pPr>
             <a:r>
-              <a:rPr sz="1200" b="0" i="0">
+              <a:rPr sz="1600" b="0" i="0">
                 <a:solidFill>
                   <a:srgbClr val="333333"/>
                 </a:solidFill>
@@ -7257,7 +8631,7 @@
               </a:spcAft>
             </a:pPr>
             <a:r>
-              <a:rPr sz="1200" b="0" i="0">
+              <a:rPr sz="1600" b="0" i="0">
                 <a:solidFill>
                   <a:srgbClr val="333333"/>
                 </a:solidFill>
@@ -7273,7 +8647,7 @@
               </a:spcAft>
             </a:pPr>
             <a:r>
-              <a:rPr sz="1200" b="0" i="0">
+              <a:rPr sz="1600" b="0" i="0">
                 <a:solidFill>
                   <a:srgbClr val="333333"/>
                 </a:solidFill>
@@ -7289,7 +8663,7 @@
               </a:spcAft>
             </a:pPr>
             <a:r>
-              <a:rPr sz="1200" b="0" i="0">
+              <a:rPr sz="1600" b="0" i="0">
                 <a:solidFill>
                   <a:srgbClr val="333333"/>
                 </a:solidFill>
@@ -7308,8 +8682,8 @@
 </p:sld>
 </file>
 
-<file path=ppt/slides/slide15.xml><?xml version="1.0" encoding="utf-8"?>
-<p:sld xmlns:a="http://schemas.openxmlformats.org/drawingml/2006/main" xmlns:p="http://schemas.openxmlformats.org/presentationml/2006/main" xmlns:r="http://schemas.openxmlformats.org/officeDocument/2006/relationships">
+<file path=ppt/slides/slide9.xml><?xml version="1.0" encoding="utf-8"?>
+<p:sld xmlns:a="http://schemas.openxmlformats.org/drawingml/2006/main" xmlns:r="http://schemas.openxmlformats.org/officeDocument/2006/relationships" xmlns:p="http://schemas.openxmlformats.org/presentationml/2006/main">
   <p:cSld>
     <p:spTree>
       <p:nvGrpSpPr>
@@ -7317,7 +8691,14 @@
         <p:cNvGrpSpPr/>
         <p:nvPr/>
       </p:nvGrpSpPr>
-      <p:grpSpPr/>
+      <p:grpSpPr>
+        <a:xfrm>
+          <a:off x="0" y="0"/>
+          <a:ext cx="0" cy="0"/>
+          <a:chOff x="0" y="0"/>
+          <a:chExt cx="0" cy="0"/>
+        </a:xfrm>
+      </p:grpSpPr>
       <p:sp>
         <p:nvSpPr>
           <p:cNvPr id="2" name="Title 1"/>
@@ -7334,10 +8715,7 @@
           <a:lstStyle/>
           <a:p>
             <a:r>
-              <a:rPr sz="3200" b="1">
-                <a:solidFill>
-                  <a:srgbClr val="663399"/>
-                </a:solidFill>
+              <a:rPr sz="3200" b="1" dirty="0">
                 <a:latin typeface="Calibri"/>
               </a:rPr>
               <a:t>Session Summary</a:t>
@@ -7362,7 +8740,7 @@
           <a:noFill/>
         </p:spPr>
         <p:txBody>
-          <a:bodyPr wrap="square" anchor="t" lIns="45720" rIns="45720">
+          <a:bodyPr wrap="square" lIns="45720" rIns="45720" anchor="t">
             <a:spAutoFit/>
           </a:bodyPr>
           <a:lstStyle/>
@@ -7417,7 +8795,7 @@
           </a:fontRef>
         </p:style>
         <p:txBody>
-          <a:bodyPr rtlCol="0" anchor="ctr" lIns="0" rIns="0"/>
+          <a:bodyPr lIns="0" rIns="0" rtlCol="0" anchor="ctr"/>
           <a:lstStyle/>
           <a:p>
             <a:pPr algn="ctr"/>
@@ -7450,7 +8828,7 @@
           <a:noFill/>
         </p:spPr>
         <p:txBody>
-          <a:bodyPr wrap="square" anchor="t" lIns="45720" rIns="45720">
+          <a:bodyPr wrap="square" lIns="45720" rIns="45720" anchor="t">
             <a:spAutoFit/>
           </a:bodyPr>
           <a:lstStyle/>
@@ -7485,7 +8863,7 @@
           <a:noFill/>
         </p:spPr>
         <p:txBody>
-          <a:bodyPr wrap="square" anchor="t" lIns="45720" rIns="45720">
+          <a:bodyPr wrap="square" lIns="45720" rIns="45720" anchor="t">
             <a:spAutoFit/>
           </a:bodyPr>
           <a:lstStyle/>
@@ -7540,7 +8918,7 @@
           </a:fontRef>
         </p:style>
         <p:txBody>
-          <a:bodyPr rtlCol="0" anchor="ctr" lIns="0" rIns="0"/>
+          <a:bodyPr lIns="0" rIns="0" rtlCol="0" anchor="ctr"/>
           <a:lstStyle/>
           <a:p>
             <a:pPr algn="ctr"/>
@@ -7573,7 +8951,7 @@
           <a:noFill/>
         </p:spPr>
         <p:txBody>
-          <a:bodyPr wrap="square" anchor="t" lIns="45720" rIns="45720">
+          <a:bodyPr wrap="square" lIns="45720" rIns="45720" anchor="t">
             <a:spAutoFit/>
           </a:bodyPr>
           <a:lstStyle/>
@@ -7608,7 +8986,7 @@
           <a:noFill/>
         </p:spPr>
         <p:txBody>
-          <a:bodyPr wrap="square" anchor="t" lIns="45720" rIns="45720">
+          <a:bodyPr wrap="square" lIns="45720" rIns="45720" anchor="t">
             <a:spAutoFit/>
           </a:bodyPr>
           <a:lstStyle/>
@@ -7663,7 +9041,7 @@
           </a:fontRef>
         </p:style>
         <p:txBody>
-          <a:bodyPr rtlCol="0" anchor="ctr" lIns="0" rIns="0"/>
+          <a:bodyPr lIns="0" rIns="0" rtlCol="0" anchor="ctr"/>
           <a:lstStyle/>
           <a:p>
             <a:pPr algn="ctr"/>
@@ -7696,7 +9074,7 @@
           <a:noFill/>
         </p:spPr>
         <p:txBody>
-          <a:bodyPr wrap="square" anchor="t" lIns="45720" rIns="45720">
+          <a:bodyPr wrap="square" lIns="45720" rIns="45720" anchor="t">
             <a:spAutoFit/>
           </a:bodyPr>
           <a:lstStyle/>
@@ -7731,7 +9109,7 @@
           <a:noFill/>
         </p:spPr>
         <p:txBody>
-          <a:bodyPr wrap="square" anchor="t" lIns="45720" rIns="45720">
+          <a:bodyPr wrap="square" lIns="45720" rIns="45720" anchor="t">
             <a:spAutoFit/>
           </a:bodyPr>
           <a:lstStyle/>
@@ -7786,7 +9164,7 @@
           </a:fontRef>
         </p:style>
         <p:txBody>
-          <a:bodyPr rtlCol="0" anchor="ctr" lIns="0" rIns="0"/>
+          <a:bodyPr lIns="0" rIns="0" rtlCol="0" anchor="ctr"/>
           <a:lstStyle/>
           <a:p>
             <a:pPr algn="ctr"/>
@@ -7819,7 +9197,7 @@
           <a:noFill/>
         </p:spPr>
         <p:txBody>
-          <a:bodyPr wrap="square" anchor="t" lIns="45720" rIns="45720">
+          <a:bodyPr wrap="square" lIns="45720" rIns="45720" anchor="t">
             <a:spAutoFit/>
           </a:bodyPr>
           <a:lstStyle/>
@@ -7854,7 +9232,7 @@
           <a:noFill/>
         </p:spPr>
         <p:txBody>
-          <a:bodyPr wrap="square" anchor="t" lIns="45720" rIns="45720">
+          <a:bodyPr wrap="square" lIns="45720" rIns="45720" anchor="t">
             <a:spAutoFit/>
           </a:bodyPr>
           <a:lstStyle/>
@@ -7909,7 +9287,7 @@
           </a:fontRef>
         </p:style>
         <p:txBody>
-          <a:bodyPr rtlCol="0" anchor="ctr" lIns="0" rIns="0"/>
+          <a:bodyPr lIns="0" rIns="0" rtlCol="0" anchor="ctr"/>
           <a:lstStyle/>
           <a:p>
             <a:pPr algn="ctr"/>
@@ -7942,7 +9320,7 @@
           <a:noFill/>
         </p:spPr>
         <p:txBody>
-          <a:bodyPr wrap="square" anchor="t" lIns="45720" rIns="45720">
+          <a:bodyPr wrap="square" lIns="45720" rIns="45720" anchor="t">
             <a:spAutoFit/>
           </a:bodyPr>
           <a:lstStyle/>
@@ -7977,7 +9355,7 @@
           <a:noFill/>
         </p:spPr>
         <p:txBody>
-          <a:bodyPr wrap="square" anchor="t" lIns="45720" rIns="45720">
+          <a:bodyPr wrap="square" lIns="45720" rIns="45720" anchor="t">
             <a:spAutoFit/>
           </a:bodyPr>
           <a:lstStyle/>
@@ -8032,12 +9410,12 @@
           </a:fontRef>
         </p:style>
         <p:txBody>
-          <a:bodyPr rtlCol="0" anchor="ctr" lIns="228600"/>
+          <a:bodyPr lIns="228600" rtlCol="0" anchor="ctr"/>
           <a:lstStyle/>
           <a:p>
             <a:pPr algn="ctr"/>
             <a:r>
-              <a:rPr sz="1400" b="1">
+              <a:rPr sz="1400" b="1" dirty="0">
                 <a:solidFill>
                   <a:srgbClr val="663399"/>
                 </a:solidFill>
@@ -8046,884 +9424,13 @@
               <a:t>Next session  →  </a:t>
             </a:r>
             <a:r>
-              <a:rPr sz="1400">
+              <a:rPr sz="1400" dirty="0">
                 <a:solidFill>
                   <a:srgbClr val="333333"/>
                 </a:solidFill>
                 <a:latin typeface="Calibri"/>
               </a:rPr>
-              <a:t>License Compliance &amp; SBOM (60 min)</a:t>
-            </a:r>
-          </a:p>
-        </p:txBody>
-      </p:sp>
-    </p:spTree>
-  </p:cSld>
-  <p:clrMapOvr>
-    <a:masterClrMapping/>
-  </p:clrMapOvr>
-</p:sld>
-</file>
-
-<file path=ppt/slides/slide7.xml><?xml version="1.0" encoding="utf-8"?>
-<p:sld xmlns:a="http://schemas.openxmlformats.org/drawingml/2006/main" xmlns:p="http://schemas.openxmlformats.org/presentationml/2006/main" xmlns:r="http://schemas.openxmlformats.org/officeDocument/2006/relationships">
-  <p:cSld>
-    <p:spTree>
-      <p:nvGrpSpPr>
-        <p:cNvPr id="1" name=""/>
-        <p:cNvGrpSpPr/>
-        <p:nvPr/>
-      </p:nvGrpSpPr>
-      <p:grpSpPr/>
-      <p:sp>
-        <p:nvSpPr>
-          <p:cNvPr id="2" name="Title 1"/>
-          <p:cNvSpPr>
-            <a:spLocks noGrp="1"/>
-          </p:cNvSpPr>
-          <p:nvPr>
-            <p:ph type="ctrTitle"/>
-          </p:nvPr>
-        </p:nvSpPr>
-        <p:spPr/>
-        <p:txBody>
-          <a:bodyPr/>
-          <a:lstStyle/>
-          <a:p>
-            <a:r>
-              <a:rPr sz="4400" b="1">
-                <a:solidFill>
-                  <a:srgbClr val="FFFFFF"/>
-                </a:solidFill>
-                <a:latin typeface="Calibri"/>
-              </a:rPr>
-              <a:t>Developer Workflow — SDK, eSDK, devtool</a:t>
-            </a:r>
-          </a:p>
-        </p:txBody>
-      </p:sp>
-      <p:sp>
-        <p:nvSpPr>
-          <p:cNvPr id="3" name="Subtitle 2"/>
-          <p:cNvSpPr>
-            <a:spLocks noGrp="1"/>
-          </p:cNvSpPr>
-          <p:nvPr>
-            <p:ph type="subTitle" idx="1"/>
-          </p:nvPr>
-        </p:nvSpPr>
-        <p:spPr/>
-        <p:txBody>
-          <a:bodyPr/>
-          <a:lstStyle/>
-          <a:p>
-            <a:r>
-              <a:rPr sz="2200" i="1">
-                <a:solidFill>
-                  <a:srgbClr val="FFFFFF"/>
-                </a:solidFill>
-                <a:latin typeface="Calibri"/>
-              </a:rPr>
-              <a:t>Day 3 • Session 6 • 75 minutes</a:t>
-            </a:r>
-          </a:p>
-          <a:p>
-            <a:r>
-              <a:rPr sz="1800">
-                <a:solidFill>
-                  <a:srgbClr val="FFFFFF"/>
-                </a:solidFill>
-                <a:latin typeface="Calibri"/>
-              </a:rPr>
-              <a:t>How your team actually works against a Yocto build</a:t>
-            </a:r>
-          </a:p>
-        </p:txBody>
-      </p:sp>
-    </p:spTree>
-  </p:cSld>
-  <p:clrMapOvr>
-    <a:masterClrMapping/>
-  </p:clrMapOvr>
-</p:sld>
-</file>
-
-<file path=ppt/slides/slide8.xml><?xml version="1.0" encoding="utf-8"?>
-<p:sld xmlns:a="http://schemas.openxmlformats.org/drawingml/2006/main" xmlns:p="http://schemas.openxmlformats.org/presentationml/2006/main" xmlns:r="http://schemas.openxmlformats.org/officeDocument/2006/relationships">
-  <p:cSld>
-    <p:spTree>
-      <p:nvGrpSpPr>
-        <p:cNvPr id="1" name=""/>
-        <p:cNvGrpSpPr/>
-        <p:nvPr/>
-      </p:nvGrpSpPr>
-      <p:grpSpPr/>
-      <p:sp>
-        <p:nvSpPr>
-          <p:cNvPr id="2" name="Title 1"/>
-          <p:cNvSpPr>
-            <a:spLocks noGrp="1"/>
-          </p:cNvSpPr>
-          <p:nvPr>
-            <p:ph type="title"/>
-          </p:nvPr>
-        </p:nvSpPr>
-        <p:spPr/>
-        <p:txBody>
-          <a:bodyPr/>
-          <a:lstStyle/>
-          <a:p>
-            <a:r>
-              <a:rPr sz="3200" b="1">
-                <a:solidFill>
-                  <a:srgbClr val="CC0066"/>
-                </a:solidFill>
-                <a:latin typeface="Calibri"/>
-              </a:rPr>
-              <a:t>Session Agenda</a:t>
-            </a:r>
-          </a:p>
-        </p:txBody>
-      </p:sp>
-      <p:sp>
-        <p:nvSpPr>
-          <p:cNvPr id="3" name="TextBox 2"/>
-          <p:cNvSpPr txBox="1"/>
-          <p:nvPr/>
-        </p:nvSpPr>
-        <p:spPr>
-          <a:xfrm>
-            <a:off x="822960" y="1463040"/>
-            <a:ext cx="10515600" cy="5029200"/>
-          </a:xfrm>
-          <a:prstGeom prst="rect">
-            <a:avLst/>
-          </a:prstGeom>
-          <a:noFill/>
-        </p:spPr>
-        <p:txBody>
-          <a:bodyPr wrap="square" lIns="45720" rIns="45720">
-            <a:spAutoFit/>
-          </a:bodyPr>
-          <a:lstStyle/>
-          <a:p>
-            <a:pPr>
-              <a:spcAft>
-                <a:spcPts val="600"/>
-              </a:spcAft>
-            </a:pPr>
-            <a:r>
-              <a:rPr sz="2000" b="0" i="0">
-                <a:solidFill>
-                  <a:srgbClr val="333333"/>
-                </a:solidFill>
-                <a:latin typeface="Calibri"/>
-              </a:rPr>
-              <a:t>1.  SDK vs eSDK — what each is for</a:t>
-            </a:r>
-          </a:p>
-          <a:p>
-            <a:pPr>
-              <a:spcAft>
-                <a:spcPts val="600"/>
-              </a:spcAft>
-            </a:pPr>
-            <a:r>
-              <a:rPr sz="2000" b="0" i="0">
-                <a:solidFill>
-                  <a:srgbClr val="333333"/>
-                </a:solidFill>
-                <a:latin typeface="Calibri"/>
-              </a:rPr>
-              <a:t>2.  Generating and using the standard SDK</a:t>
-            </a:r>
-          </a:p>
-          <a:p>
-            <a:pPr>
-              <a:spcAft>
-                <a:spcPts val="600"/>
-              </a:spcAft>
-            </a:pPr>
-            <a:r>
-              <a:rPr sz="2000" b="0" i="0">
-                <a:solidFill>
-                  <a:srgbClr val="333333"/>
-                </a:solidFill>
-                <a:latin typeface="Calibri"/>
-              </a:rPr>
-              <a:t>3.  Extensible SDK — the application developer's tool</a:t>
-            </a:r>
-          </a:p>
-          <a:p>
-            <a:pPr>
-              <a:spcAft>
-                <a:spcPts val="600"/>
-              </a:spcAft>
-            </a:pPr>
-            <a:r>
-              <a:rPr sz="2000" b="0" i="0">
-                <a:solidFill>
-                  <a:srgbClr val="333333"/>
-                </a:solidFill>
-                <a:latin typeface="Calibri"/>
-              </a:rPr>
-              <a:t>4.  devtool — the modify/build/deploy/finish loop</a:t>
-            </a:r>
-          </a:p>
-          <a:p>
-            <a:pPr>
-              <a:spcAft>
-                <a:spcPts val="600"/>
-              </a:spcAft>
-            </a:pPr>
-            <a:r>
-              <a:rPr sz="2000" b="0" i="0">
-                <a:solidFill>
-                  <a:srgbClr val="333333"/>
-                </a:solidFill>
-                <a:latin typeface="Calibri"/>
-              </a:rPr>
-              <a:t>5.  Team workflow patterns</a:t>
-            </a:r>
-          </a:p>
-          <a:p>
-            <a:pPr>
-              <a:spcAft>
-                <a:spcPts val="600"/>
-              </a:spcAft>
-            </a:pPr>
-            <a:r>
-              <a:rPr sz="2000" b="0" i="0">
-                <a:solidFill>
-                  <a:srgbClr val="333333"/>
-                </a:solidFill>
-                <a:latin typeface="Calibri"/>
-              </a:rPr>
-              <a:t>6.  Integrating with IDEs and CI</a:t>
-            </a:r>
-          </a:p>
-        </p:txBody>
-      </p:sp>
-    </p:spTree>
-  </p:cSld>
-  <p:clrMapOvr>
-    <a:masterClrMapping/>
-  </p:clrMapOvr>
-</p:sld>
-</file>
-
-<file path=ppt/slides/slide9.xml><?xml version="1.0" encoding="utf-8"?>
-<p:sld xmlns:a="http://schemas.openxmlformats.org/drawingml/2006/main" xmlns:p="http://schemas.openxmlformats.org/presentationml/2006/main" xmlns:r="http://schemas.openxmlformats.org/officeDocument/2006/relationships">
-  <p:cSld>
-    <p:spTree>
-      <p:nvGrpSpPr>
-        <p:cNvPr id="1" name=""/>
-        <p:cNvGrpSpPr/>
-        <p:nvPr/>
-      </p:nvGrpSpPr>
-      <p:grpSpPr/>
-      <p:sp>
-        <p:nvSpPr>
-          <p:cNvPr id="2" name="Title 1"/>
-          <p:cNvSpPr>
-            <a:spLocks noGrp="1"/>
-          </p:cNvSpPr>
-          <p:nvPr>
-            <p:ph type="title"/>
-          </p:nvPr>
-        </p:nvSpPr>
-        <p:spPr/>
-        <p:txBody>
-          <a:bodyPr/>
-          <a:lstStyle/>
-          <a:p>
-            <a:r>
-              <a:rPr sz="3200" b="1">
-                <a:solidFill>
-                  <a:srgbClr val="CC0066"/>
-                </a:solidFill>
-                <a:latin typeface="Calibri"/>
-              </a:rPr>
-              <a:t>Two SDKs, Different Goals</a:t>
-            </a:r>
-          </a:p>
-        </p:txBody>
-      </p:sp>
-      <p:sp>
-        <p:nvSpPr>
-          <p:cNvPr id="3" name="TextBox 2"/>
-          <p:cNvSpPr txBox="1"/>
-          <p:nvPr/>
-        </p:nvSpPr>
-        <p:spPr>
-          <a:xfrm>
-            <a:off x="822960" y="1417320"/>
-            <a:ext cx="10515600" cy="365760"/>
-          </a:xfrm>
-          <a:prstGeom prst="rect">
-            <a:avLst/>
-          </a:prstGeom>
-          <a:noFill/>
-        </p:spPr>
-        <p:txBody>
-          <a:bodyPr wrap="square" anchor="t" lIns="45720" rIns="45720">
-            <a:spAutoFit/>
-          </a:bodyPr>
-          <a:lstStyle/>
-          <a:p>
-            <a:pPr algn="l"/>
-            <a:r>
-              <a:rPr sz="1500" b="0" i="1">
-                <a:solidFill>
-                  <a:srgbClr val="666666"/>
-                </a:solidFill>
-                <a:latin typeface="Calibri"/>
-              </a:rPr>
-              <a:t>Pick by who's using it and what they need to do.</a:t>
-            </a:r>
-          </a:p>
-        </p:txBody>
-      </p:sp>
-      <p:sp>
-        <p:nvSpPr>
-          <p:cNvPr id="4" name="Rounded Rectangle 3"/>
-          <p:cNvSpPr/>
-          <p:nvPr/>
-        </p:nvSpPr>
-        <p:spPr>
-          <a:xfrm>
-            <a:off x="822960" y="1783080"/>
-            <a:ext cx="5120640" cy="4572000"/>
-          </a:xfrm>
-          <a:prstGeom prst="roundRect">
-            <a:avLst/>
-          </a:prstGeom>
-          <a:solidFill>
-            <a:srgbClr val="FCE4EC"/>
-          </a:solidFill>
-          <a:ln w="6350">
-            <a:solidFill>
-              <a:srgbClr val="CC0066"/>
-            </a:solidFill>
-          </a:ln>
-          <a:effectLst/>
-        </p:spPr>
-        <p:style>
-          <a:lnRef idx="1">
-            <a:schemeClr val="accent1"/>
-          </a:lnRef>
-          <a:fillRef idx="3">
-            <a:schemeClr val="accent1"/>
-          </a:fillRef>
-          <a:effectRef idx="2">
-            <a:schemeClr val="accent1"/>
-          </a:effectRef>
-          <a:fontRef idx="minor">
-            <a:schemeClr val="lt1"/>
-          </a:fontRef>
-        </p:style>
-        <p:txBody>
-          <a:bodyPr rtlCol="0" anchor="ctr"/>
-          <a:lstStyle/>
-          <a:p>
-            <a:pPr algn="ctr"/>
-          </a:p>
-        </p:txBody>
-      </p:sp>
-      <p:sp>
-        <p:nvSpPr>
-          <p:cNvPr id="5" name="TextBox 4"/>
-          <p:cNvSpPr txBox="1"/>
-          <p:nvPr/>
-        </p:nvSpPr>
-        <p:spPr>
-          <a:xfrm>
-            <a:off x="960120" y="1920240"/>
-            <a:ext cx="4937760" cy="457200"/>
-          </a:xfrm>
-          <a:prstGeom prst="rect">
-            <a:avLst/>
-          </a:prstGeom>
-          <a:noFill/>
-        </p:spPr>
-        <p:txBody>
-          <a:bodyPr wrap="square" anchor="t" lIns="45720" rIns="45720">
-            <a:spAutoFit/>
-          </a:bodyPr>
-          <a:lstStyle/>
-          <a:p>
-            <a:pPr algn="l"/>
-            <a:r>
-              <a:rPr sz="1800" b="1" i="0">
-                <a:solidFill>
-                  <a:srgbClr val="CC0066"/>
-                </a:solidFill>
-                <a:latin typeface="Calibri"/>
-              </a:rPr>
-              <a:t>SDK (standard)</a:t>
-            </a:r>
-          </a:p>
-        </p:txBody>
-      </p:sp>
-      <p:sp>
-        <p:nvSpPr>
-          <p:cNvPr id="6" name="TextBox 5"/>
-          <p:cNvSpPr txBox="1"/>
-          <p:nvPr/>
-        </p:nvSpPr>
-        <p:spPr>
-          <a:xfrm>
-            <a:off x="960120" y="2468880"/>
-            <a:ext cx="4937760" cy="3794760"/>
-          </a:xfrm>
-          <a:prstGeom prst="rect">
-            <a:avLst/>
-          </a:prstGeom>
-          <a:noFill/>
-        </p:spPr>
-        <p:txBody>
-          <a:bodyPr wrap="square" lIns="45720" rIns="45720">
-            <a:spAutoFit/>
-          </a:bodyPr>
-          <a:lstStyle/>
-          <a:p>
-            <a:pPr>
-              <a:spcAft>
-                <a:spcPts val="400"/>
-              </a:spcAft>
-            </a:pPr>
-            <a:r>
-              <a:rPr sz="1400" b="1" i="0">
-                <a:solidFill>
-                  <a:srgbClr val="CC0066"/>
-                </a:solidFill>
-                <a:latin typeface="Calibri"/>
-              </a:rPr>
-              <a:t>Goal</a:t>
-            </a:r>
-          </a:p>
-          <a:p>
-            <a:pPr>
-              <a:spcAft>
-                <a:spcPts val="1000"/>
-              </a:spcAft>
-            </a:pPr>
-            <a:r>
-              <a:rPr sz="1200" b="0" i="0">
-                <a:solidFill>
-                  <a:srgbClr val="333333"/>
-                </a:solidFill>
-                <a:latin typeface="Calibri"/>
-              </a:rPr>
-              <a:t>Cross-compile applications against a target sysroot</a:t>
-            </a:r>
-          </a:p>
-          <a:p>
-            <a:pPr>
-              <a:spcAft>
-                <a:spcPts val="400"/>
-              </a:spcAft>
-            </a:pPr>
-            <a:r>
-              <a:rPr sz="1400" b="1" i="0">
-                <a:solidFill>
-                  <a:srgbClr val="CC0066"/>
-                </a:solidFill>
-                <a:latin typeface="Calibri"/>
-              </a:rPr>
-              <a:t>Who uses it</a:t>
-            </a:r>
-          </a:p>
-          <a:p>
-            <a:pPr>
-              <a:spcAft>
-                <a:spcPts val="1000"/>
-              </a:spcAft>
-            </a:pPr>
-            <a:r>
-              <a:rPr sz="1200" b="0" i="0">
-                <a:solidFill>
-                  <a:srgbClr val="333333"/>
-                </a:solidFill>
-                <a:latin typeface="Calibri"/>
-              </a:rPr>
-              <a:t>App developers writing C/C++/Rust/Go for the target</a:t>
-            </a:r>
-          </a:p>
-          <a:p>
-            <a:pPr>
-              <a:spcAft>
-                <a:spcPts val="400"/>
-              </a:spcAft>
-            </a:pPr>
-            <a:r>
-              <a:rPr sz="1400" b="1" i="0">
-                <a:solidFill>
-                  <a:srgbClr val="CC0066"/>
-                </a:solidFill>
-                <a:latin typeface="Calibri"/>
-              </a:rPr>
-              <a:t>What it contains</a:t>
-            </a:r>
-          </a:p>
-          <a:p>
-            <a:pPr>
-              <a:spcAft>
-                <a:spcPts val="400"/>
-              </a:spcAft>
-            </a:pPr>
-            <a:r>
-              <a:rPr sz="1200" b="0" i="0">
-                <a:solidFill>
-                  <a:srgbClr val="333333"/>
-                </a:solidFill>
-                <a:latin typeface="Calibri"/>
-              </a:rPr>
-              <a:t>• Cross-toolchain</a:t>
-            </a:r>
-          </a:p>
-          <a:p>
-            <a:pPr>
-              <a:spcAft>
-                <a:spcPts val="400"/>
-              </a:spcAft>
-            </a:pPr>
-            <a:r>
-              <a:rPr sz="1200" b="0" i="0">
-                <a:solidFill>
-                  <a:srgbClr val="333333"/>
-                </a:solidFill>
-                <a:latin typeface="Calibri"/>
-              </a:rPr>
-              <a:t>• Target sysroot (headers, libs)</a:t>
-            </a:r>
-          </a:p>
-          <a:p>
-            <a:pPr>
-              <a:spcAft>
-                <a:spcPts val="800"/>
-              </a:spcAft>
-            </a:pPr>
-            <a:r>
-              <a:rPr sz="1200" b="0" i="0">
-                <a:solidFill>
-                  <a:srgbClr val="333333"/>
-                </a:solidFill>
-                <a:latin typeface="Calibri"/>
-              </a:rPr>
-              <a:t>• Environment script</a:t>
-            </a:r>
-          </a:p>
-          <a:p>
-            <a:pPr>
-              <a:spcAft>
-                <a:spcPts val="400"/>
-              </a:spcAft>
-            </a:pPr>
-            <a:r>
-              <a:rPr sz="1400" b="1" i="0">
-                <a:solidFill>
-                  <a:srgbClr val="CC0066"/>
-                </a:solidFill>
-                <a:latin typeface="Calibri"/>
-              </a:rPr>
-              <a:t>Generate</a:t>
-            </a:r>
-          </a:p>
-          <a:p>
-            <a:pPr>
-              <a:spcAft>
-                <a:spcPts val="400"/>
-              </a:spcAft>
-            </a:pPr>
-            <a:r>
-              <a:rPr sz="1100" b="0" i="0">
-                <a:solidFill>
-                  <a:srgbClr val="333333"/>
-                </a:solidFill>
-                <a:latin typeface="Consolas"/>
-              </a:rPr>
-              <a:t>bitbake core-image-base -c populate_sdk</a:t>
-            </a:r>
-          </a:p>
-        </p:txBody>
-      </p:sp>
-      <p:sp>
-        <p:nvSpPr>
-          <p:cNvPr id="7" name="Rounded Rectangle 6"/>
-          <p:cNvSpPr/>
-          <p:nvPr/>
-        </p:nvSpPr>
-        <p:spPr>
-          <a:xfrm>
-            <a:off x="6263640" y="1783080"/>
-            <a:ext cx="5120640" cy="4572000"/>
-          </a:xfrm>
-          <a:prstGeom prst="roundRect">
-            <a:avLst/>
-          </a:prstGeom>
-          <a:solidFill>
-            <a:srgbClr val="E9D8F0"/>
-          </a:solidFill>
-          <a:ln w="6350">
-            <a:solidFill>
-              <a:srgbClr val="663399"/>
-            </a:solidFill>
-          </a:ln>
-          <a:effectLst/>
-        </p:spPr>
-        <p:style>
-          <a:lnRef idx="1">
-            <a:schemeClr val="accent1"/>
-          </a:lnRef>
-          <a:fillRef idx="3">
-            <a:schemeClr val="accent1"/>
-          </a:fillRef>
-          <a:effectRef idx="2">
-            <a:schemeClr val="accent1"/>
-          </a:effectRef>
-          <a:fontRef idx="minor">
-            <a:schemeClr val="lt1"/>
-          </a:fontRef>
-        </p:style>
-        <p:txBody>
-          <a:bodyPr rtlCol="0" anchor="ctr"/>
-          <a:lstStyle/>
-          <a:p>
-            <a:pPr algn="ctr"/>
-          </a:p>
-        </p:txBody>
-      </p:sp>
-      <p:sp>
-        <p:nvSpPr>
-          <p:cNvPr id="8" name="TextBox 7"/>
-          <p:cNvSpPr txBox="1"/>
-          <p:nvPr/>
-        </p:nvSpPr>
-        <p:spPr>
-          <a:xfrm>
-            <a:off x="6400800" y="1920240"/>
-            <a:ext cx="4937760" cy="457200"/>
-          </a:xfrm>
-          <a:prstGeom prst="rect">
-            <a:avLst/>
-          </a:prstGeom>
-          <a:noFill/>
-        </p:spPr>
-        <p:txBody>
-          <a:bodyPr wrap="square" anchor="t" lIns="45720" rIns="45720">
-            <a:spAutoFit/>
-          </a:bodyPr>
-          <a:lstStyle/>
-          <a:p>
-            <a:pPr algn="l"/>
-            <a:r>
-              <a:rPr sz="1800" b="1" i="0">
-                <a:solidFill>
-                  <a:srgbClr val="663399"/>
-                </a:solidFill>
-                <a:latin typeface="Calibri"/>
-              </a:rPr>
-              <a:t>eSDK (extensible)</a:t>
-            </a:r>
-          </a:p>
-        </p:txBody>
-      </p:sp>
-      <p:sp>
-        <p:nvSpPr>
-          <p:cNvPr id="9" name="TextBox 8"/>
-          <p:cNvSpPr txBox="1"/>
-          <p:nvPr/>
-        </p:nvSpPr>
-        <p:spPr>
-          <a:xfrm>
-            <a:off x="6400800" y="2468880"/>
-            <a:ext cx="4937760" cy="3794760"/>
-          </a:xfrm>
-          <a:prstGeom prst="rect">
-            <a:avLst/>
-          </a:prstGeom>
-          <a:noFill/>
-        </p:spPr>
-        <p:txBody>
-          <a:bodyPr wrap="square" lIns="45720" rIns="45720">
-            <a:spAutoFit/>
-          </a:bodyPr>
-          <a:lstStyle/>
-          <a:p>
-            <a:pPr>
-              <a:spcAft>
-                <a:spcPts val="400"/>
-              </a:spcAft>
-            </a:pPr>
-            <a:r>
-              <a:rPr sz="1400" b="1" i="0">
-                <a:solidFill>
-                  <a:srgbClr val="663399"/>
-                </a:solidFill>
-                <a:latin typeface="Calibri"/>
-              </a:rPr>
-              <a:t>Goal</a:t>
-            </a:r>
-          </a:p>
-          <a:p>
-            <a:pPr>
-              <a:spcAft>
-                <a:spcPts val="1000"/>
-              </a:spcAft>
-            </a:pPr>
-            <a:r>
-              <a:rPr sz="1200" b="0" i="0">
-                <a:solidFill>
-                  <a:srgbClr val="333333"/>
-                </a:solidFill>
-                <a:latin typeface="Calibri"/>
-              </a:rPr>
-              <a:t>Work on recipes without the full Yocto setup</a:t>
-            </a:r>
-          </a:p>
-          <a:p>
-            <a:pPr>
-              <a:spcAft>
-                <a:spcPts val="400"/>
-              </a:spcAft>
-            </a:pPr>
-            <a:r>
-              <a:rPr sz="1400" b="1" i="0">
-                <a:solidFill>
-                  <a:srgbClr val="663399"/>
-                </a:solidFill>
-                <a:latin typeface="Calibri"/>
-              </a:rPr>
-              <a:t>Who uses it</a:t>
-            </a:r>
-          </a:p>
-          <a:p>
-            <a:pPr>
-              <a:spcAft>
-                <a:spcPts val="1000"/>
-              </a:spcAft>
-            </a:pPr>
-            <a:r>
-              <a:rPr sz="1200" b="0" i="0">
-                <a:solidFill>
-                  <a:srgbClr val="333333"/>
-                </a:solidFill>
-                <a:latin typeface="Calibri"/>
-              </a:rPr>
-              <a:t>Engineers who want to modify recipes / kernel / images</a:t>
-            </a:r>
-          </a:p>
-          <a:p>
-            <a:pPr>
-              <a:spcAft>
-                <a:spcPts val="400"/>
-              </a:spcAft>
-            </a:pPr>
-            <a:r>
-              <a:rPr sz="1400" b="1" i="0">
-                <a:solidFill>
-                  <a:srgbClr val="663399"/>
-                </a:solidFill>
-                <a:latin typeface="Calibri"/>
-              </a:rPr>
-              <a:t>What it adds</a:t>
-            </a:r>
-          </a:p>
-          <a:p>
-            <a:pPr>
-              <a:spcAft>
-                <a:spcPts val="400"/>
-              </a:spcAft>
-            </a:pPr>
-            <a:r>
-              <a:rPr sz="1200" b="0" i="0">
-                <a:solidFill>
-                  <a:srgbClr val="333333"/>
-                </a:solidFill>
-                <a:latin typeface="Calibri"/>
-              </a:rPr>
-              <a:t>• Everything in SDK</a:t>
-            </a:r>
-          </a:p>
-          <a:p>
-            <a:pPr>
-              <a:spcAft>
-                <a:spcPts val="400"/>
-              </a:spcAft>
-            </a:pPr>
-            <a:r>
-              <a:rPr sz="1200" b="0" i="0">
-                <a:solidFill>
-                  <a:srgbClr val="333333"/>
-                </a:solidFill>
-                <a:latin typeface="Calibri"/>
-              </a:rPr>
-              <a:t>• devtool</a:t>
-            </a:r>
-          </a:p>
-          <a:p>
-            <a:pPr>
-              <a:spcAft>
-                <a:spcPts val="400"/>
-              </a:spcAft>
-            </a:pPr>
-            <a:r>
-              <a:rPr sz="1200" b="0" i="0">
-                <a:solidFill>
-                  <a:srgbClr val="333333"/>
-                </a:solidFill>
-                <a:latin typeface="Calibri"/>
-              </a:rPr>
-              <a:t>• A mini-Yocto under the hood</a:t>
-            </a:r>
-          </a:p>
-          <a:p>
-            <a:pPr>
-              <a:spcAft>
-                <a:spcPts val="800"/>
-              </a:spcAft>
-            </a:pPr>
-            <a:r>
-              <a:rPr sz="1200" b="0" i="0">
-                <a:solidFill>
-                  <a:srgbClr val="333333"/>
-                </a:solidFill>
-                <a:latin typeface="Calibri"/>
-              </a:rPr>
-              <a:t>• Recipe development workflow</a:t>
-            </a:r>
-          </a:p>
-          <a:p>
-            <a:pPr>
-              <a:spcAft>
-                <a:spcPts val="400"/>
-              </a:spcAft>
-            </a:pPr>
-            <a:r>
-              <a:rPr sz="1400" b="1" i="0">
-                <a:solidFill>
-                  <a:srgbClr val="663399"/>
-                </a:solidFill>
-                <a:latin typeface="Calibri"/>
-              </a:rPr>
-              <a:t>Generate</a:t>
-            </a:r>
-          </a:p>
-          <a:p>
-            <a:pPr>
-              <a:spcAft>
-                <a:spcPts val="400"/>
-              </a:spcAft>
-            </a:pPr>
-            <a:r>
-              <a:rPr sz="1100" b="0" i="0">
-                <a:solidFill>
-                  <a:srgbClr val="333333"/>
-                </a:solidFill>
-                <a:latin typeface="Consolas"/>
-              </a:rPr>
-              <a:t>bitbake core-image-base -c populate_sdk_ext</a:t>
+              <a:t>License Compliance &amp; SBOM </a:t>
             </a:r>
           </a:p>
         </p:txBody>

--- a/yocto_training_all_session_decks/session_decks/D3S6_SDK_devtool.pptx
+++ b/yocto_training_all_session_decks/session_decks/D3S6_SDK_devtool.pptx
@@ -5212,14 +5212,64 @@
           <a:lstStyle/>
           <a:p>
             <a:r>
-              <a:rPr sz="4400" b="1">
+              <a:rPr sz="4400" b="1" dirty="0">
                 <a:solidFill>
                   <a:srgbClr val="FFFFFF"/>
                 </a:solidFill>
                 <a:latin typeface="Calibri"/>
               </a:rPr>
-              <a:t>Developer Workflow — SDK, eSDK, devtool</a:t>
-            </a:r>
+              <a:t>Developer Workflow</a:t>
+            </a:r>
+            <a:br>
+              <a:rPr lang="en-IN" b="1" dirty="0">
+                <a:solidFill>
+                  <a:srgbClr val="FFFFFF"/>
+                </a:solidFill>
+                <a:latin typeface="Calibri"/>
+              </a:rPr>
+            </a:br>
+            <a:r>
+              <a:rPr sz="3200" b="1" dirty="0">
+                <a:solidFill>
+                  <a:srgbClr val="FFFFFF"/>
+                </a:solidFill>
+                <a:latin typeface="Calibri"/>
+              </a:rPr>
+              <a:t>SDK, </a:t>
+            </a:r>
+            <a:r>
+              <a:rPr sz="3200" b="1" dirty="0" err="1">
+                <a:solidFill>
+                  <a:srgbClr val="FFFFFF"/>
+                </a:solidFill>
+                <a:latin typeface="Calibri"/>
+              </a:rPr>
+              <a:t>eSDK</a:t>
+            </a:r>
+            <a:r>
+              <a:rPr sz="3200" b="1" dirty="0">
+                <a:solidFill>
+                  <a:srgbClr val="FFFFFF"/>
+                </a:solidFill>
+                <a:latin typeface="Calibri"/>
+              </a:rPr>
+              <a:t>, </a:t>
+            </a:r>
+            <a:r>
+              <a:rPr sz="3200" b="1" dirty="0" err="1">
+                <a:solidFill>
+                  <a:srgbClr val="FFFFFF"/>
+                </a:solidFill>
+                <a:latin typeface="Calibri"/>
+              </a:rPr>
+              <a:t>devtool</a:t>
+            </a:r>
+            <a:endParaRPr sz="4400" b="1" dirty="0">
+              <a:solidFill>
+                <a:srgbClr val="FFFFFF"/>
+              </a:solidFill>
+              <a:latin typeface="Calibri"/>
+            </a:endParaRPr>
           </a:p>
         </p:txBody>
       </p:sp>
